--- a/yinni_app_proposal.pptx
+++ b/yinni_app_proposal.pptx
@@ -5,7 +5,7 @@
     <p:sldMasterId id="2147483648" r:id="rId1"/>
   </p:sldMasterIdLst>
   <p:notesMasterIdLst>
-    <p:notesMasterId r:id="rId23"/>
+    <p:notesMasterId r:id="rId24"/>
   </p:notesMasterIdLst>
   <p:sldIdLst>
     <p:sldId id="256" r:id="rId2"/>
@@ -25,36 +25,37 @@
     <p:sldId id="284" r:id="rId16"/>
     <p:sldId id="285" r:id="rId17"/>
     <p:sldId id="286" r:id="rId18"/>
-    <p:sldId id="267" r:id="rId19"/>
-    <p:sldId id="287" r:id="rId20"/>
-    <p:sldId id="269" r:id="rId21"/>
-    <p:sldId id="270" r:id="rId22"/>
+    <p:sldId id="288" r:id="rId19"/>
+    <p:sldId id="267" r:id="rId20"/>
+    <p:sldId id="287" r:id="rId21"/>
+    <p:sldId id="269" r:id="rId22"/>
+    <p:sldId id="270" r:id="rId23"/>
   </p:sldIdLst>
   <p:sldSz cx="18288000" cy="10287000"/>
   <p:notesSz cx="6858000" cy="9144000"/>
   <p:embeddedFontLst>
     <p:embeddedFont>
       <p:font typeface="Coco Gothic" panose="020B0604020202020204" charset="0"/>
-      <p:regular r:id="rId24"/>
+      <p:regular r:id="rId25"/>
     </p:embeddedFont>
     <p:embeddedFont>
       <p:font typeface="Coco Gothic Bold" panose="020B0604020202020204" charset="0"/>
-      <p:regular r:id="rId25"/>
+      <p:regular r:id="rId26"/>
     </p:embeddedFont>
     <p:embeddedFont>
       <p:font typeface="Coco Gothic Heavy" panose="020B0604020202020204" charset="0"/>
-      <p:regular r:id="rId26"/>
+      <p:regular r:id="rId27"/>
     </p:embeddedFont>
     <p:embeddedFont>
       <p:font typeface="Poppins" panose="00000500000000000000" pitchFamily="2" charset="0"/>
-      <p:regular r:id="rId27"/>
-      <p:bold r:id="rId28"/>
-      <p:italic r:id="rId29"/>
-      <p:boldItalic r:id="rId30"/>
+      <p:regular r:id="rId28"/>
+      <p:bold r:id="rId29"/>
+      <p:italic r:id="rId30"/>
+      <p:boldItalic r:id="rId31"/>
     </p:embeddedFont>
     <p:embeddedFont>
       <p:font typeface="Poppins Bold" panose="00000800000000000000" charset="0"/>
-      <p:regular r:id="rId31"/>
+      <p:regular r:id="rId32"/>
     </p:embeddedFont>
   </p:embeddedFontLst>
   <p:defaultTextStyle>
@@ -15237,6 +15238,670 @@
 <file path=ppt/slides/slide18.xml><?xml version="1.0" encoding="utf-8"?>
 <p:sld xmlns:a="http://schemas.openxmlformats.org/drawingml/2006/main" xmlns:r="http://schemas.openxmlformats.org/officeDocument/2006/relationships" xmlns:p="http://schemas.openxmlformats.org/presentationml/2006/main">
   <p:cSld>
+    <p:spTree>
+      <p:nvGrpSpPr>
+        <p:cNvPr id="1" name="">
+          <a:extLst>
+            <a:ext uri="{FF2B5EF4-FFF2-40B4-BE49-F238E27FC236}">
+              <a16:creationId xmlns:a16="http://schemas.microsoft.com/office/drawing/2014/main" id="{4C6A0DCF-DFEE-08CE-0FC4-5D8350066F75}"/>
+            </a:ext>
+          </a:extLst>
+        </p:cNvPr>
+        <p:cNvGrpSpPr/>
+        <p:nvPr/>
+      </p:nvGrpSpPr>
+      <p:grpSpPr>
+        <a:xfrm>
+          <a:off x="0" y="0"/>
+          <a:ext cx="0" cy="0"/>
+          <a:chOff x="0" y="0"/>
+          <a:chExt cx="0" cy="0"/>
+        </a:xfrm>
+      </p:grpSpPr>
+      <p:grpSp>
+        <p:nvGrpSpPr>
+          <p:cNvPr id="5" name="Group 5">
+            <a:extLst>
+              <a:ext uri="{FF2B5EF4-FFF2-40B4-BE49-F238E27FC236}">
+                <a16:creationId xmlns:a16="http://schemas.microsoft.com/office/drawing/2014/main" id="{2415F2EE-902F-ABA1-28CA-B88AA4F0ACAE}"/>
+              </a:ext>
+            </a:extLst>
+          </p:cNvPr>
+          <p:cNvGrpSpPr/>
+          <p:nvPr/>
+        </p:nvGrpSpPr>
+        <p:grpSpPr>
+          <a:xfrm>
+            <a:off x="-772763" y="9925307"/>
+            <a:ext cx="19685815" cy="801384"/>
+            <a:chOff x="0" y="0"/>
+            <a:chExt cx="5184741" cy="211064"/>
+          </a:xfrm>
+        </p:grpSpPr>
+        <p:sp>
+          <p:nvSpPr>
+            <p:cNvPr id="6" name="Freeform 6">
+              <a:extLst>
+                <a:ext uri="{FF2B5EF4-FFF2-40B4-BE49-F238E27FC236}">
+                  <a16:creationId xmlns:a16="http://schemas.microsoft.com/office/drawing/2014/main" id="{224BC0B4-72BC-F54B-20F2-8DDD43DAA0AB}"/>
+                </a:ext>
+              </a:extLst>
+            </p:cNvPr>
+            <p:cNvSpPr/>
+            <p:nvPr/>
+          </p:nvSpPr>
+          <p:spPr>
+            <a:xfrm>
+              <a:off x="0" y="0"/>
+              <a:ext cx="5184742" cy="211064"/>
+            </a:xfrm>
+            <a:custGeom>
+              <a:avLst/>
+              <a:gdLst/>
+              <a:ahLst/>
+              <a:cxnLst/>
+              <a:rect l="l" t="t" r="r" b="b"/>
+              <a:pathLst>
+                <a:path w="5184742" h="211064">
+                  <a:moveTo>
+                    <a:pt x="0" y="0"/>
+                  </a:moveTo>
+                  <a:lnTo>
+                    <a:pt x="5184742" y="0"/>
+                  </a:lnTo>
+                  <a:lnTo>
+                    <a:pt x="5184742" y="211064"/>
+                  </a:lnTo>
+                  <a:lnTo>
+                    <a:pt x="0" y="211064"/>
+                  </a:lnTo>
+                  <a:close/>
+                </a:path>
+              </a:pathLst>
+            </a:custGeom>
+            <a:solidFill>
+              <a:schemeClr val="tx2">
+                <a:lumMod val="40000"/>
+                <a:lumOff val="60000"/>
+              </a:schemeClr>
+            </a:solidFill>
+          </p:spPr>
+          <p:txBody>
+            <a:bodyPr/>
+            <a:lstStyle/>
+            <a:p>
+              <a:endParaRPr lang="en-ID" dirty="0"/>
+            </a:p>
+          </p:txBody>
+        </p:sp>
+        <p:sp>
+          <p:nvSpPr>
+            <p:cNvPr id="7" name="TextBox 7">
+              <a:extLst>
+                <a:ext uri="{FF2B5EF4-FFF2-40B4-BE49-F238E27FC236}">
+                  <a16:creationId xmlns:a16="http://schemas.microsoft.com/office/drawing/2014/main" id="{918510BE-A120-E105-DD0B-E6823574EABF}"/>
+                </a:ext>
+              </a:extLst>
+            </p:cNvPr>
+            <p:cNvSpPr txBox="1"/>
+            <p:nvPr/>
+          </p:nvSpPr>
+          <p:spPr>
+            <a:xfrm>
+              <a:off x="0" y="-57150"/>
+              <a:ext cx="5184741" cy="268214"/>
+            </a:xfrm>
+            <a:prstGeom prst="rect">
+              <a:avLst/>
+            </a:prstGeom>
+          </p:spPr>
+          <p:txBody>
+            <a:bodyPr lIns="50800" tIns="50800" rIns="50800" bIns="50800" rtlCol="0" anchor="ctr"/>
+            <a:lstStyle/>
+            <a:p>
+              <a:pPr algn="ctr">
+                <a:lnSpc>
+                  <a:spcPts val="2659"/>
+                </a:lnSpc>
+                <a:spcBef>
+                  <a:spcPct val="0"/>
+                </a:spcBef>
+              </a:pPr>
+              <a:endParaRPr dirty="0"/>
+            </a:p>
+          </p:txBody>
+        </p:sp>
+      </p:grpSp>
+      <p:grpSp>
+        <p:nvGrpSpPr>
+          <p:cNvPr id="8" name="Group 8">
+            <a:extLst>
+              <a:ext uri="{FF2B5EF4-FFF2-40B4-BE49-F238E27FC236}">
+                <a16:creationId xmlns:a16="http://schemas.microsoft.com/office/drawing/2014/main" id="{A97C8F44-82CB-C14E-5E2B-D1194C0F9E33}"/>
+              </a:ext>
+            </a:extLst>
+          </p:cNvPr>
+          <p:cNvGrpSpPr/>
+          <p:nvPr/>
+        </p:nvGrpSpPr>
+        <p:grpSpPr>
+          <a:xfrm>
+            <a:off x="-698908" y="-450729"/>
+            <a:ext cx="19685815" cy="812421"/>
+            <a:chOff x="0" y="0"/>
+            <a:chExt cx="5184741" cy="213971"/>
+          </a:xfrm>
+        </p:grpSpPr>
+        <p:sp>
+          <p:nvSpPr>
+            <p:cNvPr id="9" name="Freeform 9">
+              <a:extLst>
+                <a:ext uri="{FF2B5EF4-FFF2-40B4-BE49-F238E27FC236}">
+                  <a16:creationId xmlns:a16="http://schemas.microsoft.com/office/drawing/2014/main" id="{1CCEEA59-ED41-7E2B-C776-AF78D5F37B6A}"/>
+                </a:ext>
+              </a:extLst>
+            </p:cNvPr>
+            <p:cNvSpPr/>
+            <p:nvPr/>
+          </p:nvSpPr>
+          <p:spPr>
+            <a:xfrm>
+              <a:off x="0" y="0"/>
+              <a:ext cx="5184742" cy="213971"/>
+            </a:xfrm>
+            <a:custGeom>
+              <a:avLst/>
+              <a:gdLst/>
+              <a:ahLst/>
+              <a:cxnLst/>
+              <a:rect l="l" t="t" r="r" b="b"/>
+              <a:pathLst>
+                <a:path w="5184742" h="213971">
+                  <a:moveTo>
+                    <a:pt x="0" y="0"/>
+                  </a:moveTo>
+                  <a:lnTo>
+                    <a:pt x="5184742" y="0"/>
+                  </a:lnTo>
+                  <a:lnTo>
+                    <a:pt x="5184742" y="213971"/>
+                  </a:lnTo>
+                  <a:lnTo>
+                    <a:pt x="0" y="213971"/>
+                  </a:lnTo>
+                  <a:close/>
+                </a:path>
+              </a:pathLst>
+            </a:custGeom>
+            <a:solidFill>
+              <a:schemeClr val="tx2">
+                <a:lumMod val="20000"/>
+                <a:lumOff val="80000"/>
+              </a:schemeClr>
+            </a:solidFill>
+          </p:spPr>
+          <p:txBody>
+            <a:bodyPr/>
+            <a:lstStyle/>
+            <a:p>
+              <a:endParaRPr lang="en-ID" dirty="0"/>
+            </a:p>
+          </p:txBody>
+        </p:sp>
+        <p:sp>
+          <p:nvSpPr>
+            <p:cNvPr id="10" name="TextBox 10">
+              <a:extLst>
+                <a:ext uri="{FF2B5EF4-FFF2-40B4-BE49-F238E27FC236}">
+                  <a16:creationId xmlns:a16="http://schemas.microsoft.com/office/drawing/2014/main" id="{BFCF5718-620C-545E-CDE4-93203580E32A}"/>
+                </a:ext>
+              </a:extLst>
+            </p:cNvPr>
+            <p:cNvSpPr txBox="1"/>
+            <p:nvPr/>
+          </p:nvSpPr>
+          <p:spPr>
+            <a:xfrm>
+              <a:off x="0" y="-57150"/>
+              <a:ext cx="5184741" cy="271121"/>
+            </a:xfrm>
+            <a:prstGeom prst="rect">
+              <a:avLst/>
+            </a:prstGeom>
+          </p:spPr>
+          <p:txBody>
+            <a:bodyPr lIns="50800" tIns="50800" rIns="50800" bIns="50800" rtlCol="0" anchor="ctr"/>
+            <a:lstStyle/>
+            <a:p>
+              <a:pPr algn="ctr">
+                <a:lnSpc>
+                  <a:spcPts val="2659"/>
+                </a:lnSpc>
+                <a:spcBef>
+                  <a:spcPct val="0"/>
+                </a:spcBef>
+              </a:pPr>
+              <a:endParaRPr/>
+            </a:p>
+          </p:txBody>
+        </p:sp>
+      </p:grpSp>
+      <p:sp>
+        <p:nvSpPr>
+          <p:cNvPr id="34" name="TextBox 34">
+            <a:extLst>
+              <a:ext uri="{FF2B5EF4-FFF2-40B4-BE49-F238E27FC236}">
+                <a16:creationId xmlns:a16="http://schemas.microsoft.com/office/drawing/2014/main" id="{6C7962DD-60DC-3648-175D-EC9A12DF7CE4}"/>
+              </a:ext>
+            </a:extLst>
+          </p:cNvPr>
+          <p:cNvSpPr txBox="1"/>
+          <p:nvPr/>
+        </p:nvSpPr>
+        <p:spPr>
+          <a:xfrm>
+            <a:off x="2961830" y="1638300"/>
+            <a:ext cx="12735370" cy="874278"/>
+          </a:xfrm>
+          <a:prstGeom prst="rect">
+            <a:avLst/>
+          </a:prstGeom>
+        </p:spPr>
+        <p:txBody>
+          <a:bodyPr wrap="square" lIns="0" tIns="0" rIns="0" bIns="0" rtlCol="0" anchor="t">
+            <a:spAutoFit/>
+          </a:bodyPr>
+          <a:lstStyle/>
+          <a:p>
+            <a:pPr algn="ctr">
+              <a:lnSpc>
+                <a:spcPts val="6660"/>
+              </a:lnSpc>
+            </a:pPr>
+            <a:r>
+              <a:rPr lang="en-US" sz="6000" b="1" dirty="0">
+                <a:solidFill>
+                  <a:srgbClr val="343434"/>
+                </a:solidFill>
+                <a:latin typeface="Coco Gothic Heavy"/>
+                <a:ea typeface="Coco Gothic Heavy"/>
+                <a:cs typeface="Coco Gothic Heavy"/>
+                <a:sym typeface="Coco Gothic Heavy"/>
+              </a:rPr>
+              <a:t>Deployment in VPS</a:t>
+            </a:r>
+          </a:p>
+        </p:txBody>
+      </p:sp>
+      <p:sp>
+        <p:nvSpPr>
+          <p:cNvPr id="35" name="TextBox 35">
+            <a:extLst>
+              <a:ext uri="{FF2B5EF4-FFF2-40B4-BE49-F238E27FC236}">
+                <a16:creationId xmlns:a16="http://schemas.microsoft.com/office/drawing/2014/main" id="{2AA6D9AB-D30B-C326-F1A0-E60C25861300}"/>
+              </a:ext>
+            </a:extLst>
+          </p:cNvPr>
+          <p:cNvSpPr txBox="1"/>
+          <p:nvPr/>
+        </p:nvSpPr>
+        <p:spPr>
+          <a:xfrm>
+            <a:off x="1034654" y="2705100"/>
+            <a:ext cx="16218692" cy="700192"/>
+          </a:xfrm>
+          <a:prstGeom prst="rect">
+            <a:avLst/>
+          </a:prstGeom>
+        </p:spPr>
+        <p:txBody>
+          <a:bodyPr wrap="square" lIns="0" tIns="0" rIns="0" bIns="0" rtlCol="0" anchor="t">
+            <a:spAutoFit/>
+          </a:bodyPr>
+          <a:lstStyle/>
+          <a:p>
+            <a:pPr algn="just">
+              <a:lnSpc>
+                <a:spcPts val="2800"/>
+              </a:lnSpc>
+            </a:pPr>
+            <a:r>
+              <a:rPr lang="en-US" sz="2000" dirty="0">
+                <a:solidFill>
+                  <a:srgbClr val="343434"/>
+                </a:solidFill>
+                <a:latin typeface="Poppins"/>
+                <a:ea typeface="Poppins"/>
+                <a:cs typeface="Poppins"/>
+                <a:sym typeface="Poppins"/>
+              </a:rPr>
+              <a:t>All my application stacks are deployed Docker-container-wise to VPS. Since I have a trouble processing my payment in AWS, I cannot proceed the deployment to AWS Elastic Kubernetes Service </a:t>
+            </a:r>
+            <a:r>
+              <a:rPr lang="en-US" sz="2000">
+                <a:solidFill>
+                  <a:srgbClr val="343434"/>
+                </a:solidFill>
+                <a:latin typeface="Poppins"/>
+                <a:ea typeface="Poppins"/>
+                <a:cs typeface="Poppins"/>
+                <a:sym typeface="Poppins"/>
+              </a:rPr>
+              <a:t>or AWS Elastic Container Service as I desired. </a:t>
+            </a:r>
+            <a:endParaRPr lang="en-US" sz="2000" dirty="0">
+              <a:solidFill>
+                <a:srgbClr val="343434"/>
+              </a:solidFill>
+              <a:latin typeface="Poppins"/>
+              <a:ea typeface="Poppins"/>
+              <a:cs typeface="Poppins"/>
+              <a:sym typeface="Poppins"/>
+            </a:endParaRPr>
+          </a:p>
+        </p:txBody>
+      </p:sp>
+      <p:sp>
+        <p:nvSpPr>
+          <p:cNvPr id="38" name="TextBox 3">
+            <a:extLst>
+              <a:ext uri="{FF2B5EF4-FFF2-40B4-BE49-F238E27FC236}">
+                <a16:creationId xmlns:a16="http://schemas.microsoft.com/office/drawing/2014/main" id="{B279909E-ABA9-D7FF-C2F6-D9BF36C158C6}"/>
+              </a:ext>
+            </a:extLst>
+          </p:cNvPr>
+          <p:cNvSpPr txBox="1"/>
+          <p:nvPr/>
+        </p:nvSpPr>
+        <p:spPr>
+          <a:xfrm>
+            <a:off x="1395892" y="691659"/>
+            <a:ext cx="1565938" cy="260841"/>
+          </a:xfrm>
+          <a:prstGeom prst="rect">
+            <a:avLst/>
+          </a:prstGeom>
+        </p:spPr>
+        <p:txBody>
+          <a:bodyPr lIns="0" tIns="0" rIns="0" bIns="0" rtlCol="0" anchor="t">
+            <a:spAutoFit/>
+          </a:bodyPr>
+          <a:lstStyle/>
+          <a:p>
+            <a:pPr>
+              <a:lnSpc>
+                <a:spcPts val="1652"/>
+              </a:lnSpc>
+            </a:pPr>
+            <a:r>
+              <a:rPr lang="en-US" sz="2800" b="1" dirty="0">
+                <a:solidFill>
+                  <a:srgbClr val="343434"/>
+                </a:solidFill>
+                <a:latin typeface="Coco Gothic"/>
+                <a:ea typeface="Coco Gothic"/>
+                <a:cs typeface="Coco Gothic"/>
+                <a:sym typeface="Coco Gothic"/>
+              </a:rPr>
+              <a:t>Yinni</a:t>
+            </a:r>
+          </a:p>
+        </p:txBody>
+      </p:sp>
+      <p:sp>
+        <p:nvSpPr>
+          <p:cNvPr id="39" name="TextBox 4">
+            <a:extLst>
+              <a:ext uri="{FF2B5EF4-FFF2-40B4-BE49-F238E27FC236}">
+                <a16:creationId xmlns:a16="http://schemas.microsoft.com/office/drawing/2014/main" id="{55C6E551-94B0-D9F2-AE74-7D1DE795A082}"/>
+              </a:ext>
+            </a:extLst>
+          </p:cNvPr>
+          <p:cNvSpPr txBox="1"/>
+          <p:nvPr/>
+        </p:nvSpPr>
+        <p:spPr>
+          <a:xfrm>
+            <a:off x="1394542" y="880543"/>
+            <a:ext cx="3329858" cy="224357"/>
+          </a:xfrm>
+          <a:prstGeom prst="rect">
+            <a:avLst/>
+          </a:prstGeom>
+        </p:spPr>
+        <p:txBody>
+          <a:bodyPr wrap="square" lIns="0" tIns="0" rIns="0" bIns="0" rtlCol="0" anchor="t">
+            <a:spAutoFit/>
+          </a:bodyPr>
+          <a:lstStyle/>
+          <a:p>
+            <a:pPr>
+              <a:lnSpc>
+                <a:spcPts val="1654"/>
+              </a:lnSpc>
+            </a:pPr>
+            <a:r>
+              <a:rPr lang="en-US" sz="1654" b="1" spc="198" dirty="0">
+                <a:solidFill>
+                  <a:srgbClr val="343434"/>
+                </a:solidFill>
+                <a:latin typeface="Coco Gothic Bold"/>
+                <a:ea typeface="Coco Gothic Bold"/>
+                <a:cs typeface="Coco Gothic Bold"/>
+                <a:sym typeface="Coco Gothic Bold"/>
+              </a:rPr>
+              <a:t>AI-Assisted Shopping</a:t>
+            </a:r>
+          </a:p>
+        </p:txBody>
+      </p:sp>
+      <p:pic>
+        <p:nvPicPr>
+          <p:cNvPr id="40" name="Picture 39">
+            <a:extLst>
+              <a:ext uri="{FF2B5EF4-FFF2-40B4-BE49-F238E27FC236}">
+                <a16:creationId xmlns:a16="http://schemas.microsoft.com/office/drawing/2014/main" id="{77912DEF-B9AF-9142-9CD3-EE00B2DA9693}"/>
+              </a:ext>
+            </a:extLst>
+          </p:cNvPr>
+          <p:cNvPicPr>
+            <a:picLocks noChangeAspect="1"/>
+          </p:cNvPicPr>
+          <p:nvPr/>
+        </p:nvPicPr>
+        <p:blipFill>
+          <a:blip r:embed="rId2" cstate="print">
+            <a:extLst>
+              <a:ext uri="{28A0092B-C50C-407E-A947-70E740481C1C}">
+                <a14:useLocalDpi xmlns:a14="http://schemas.microsoft.com/office/drawing/2010/main" val="0"/>
+              </a:ext>
+            </a:extLst>
+          </a:blip>
+          <a:stretch>
+            <a:fillRect/>
+          </a:stretch>
+        </p:blipFill>
+        <p:spPr>
+          <a:xfrm>
+            <a:off x="644350" y="397507"/>
+            <a:ext cx="859793" cy="859793"/>
+          </a:xfrm>
+          <a:prstGeom prst="rect">
+            <a:avLst/>
+          </a:prstGeom>
+        </p:spPr>
+      </p:pic>
+      <p:grpSp>
+        <p:nvGrpSpPr>
+          <p:cNvPr id="144" name="Group 17">
+            <a:extLst>
+              <a:ext uri="{FF2B5EF4-FFF2-40B4-BE49-F238E27FC236}">
+                <a16:creationId xmlns:a16="http://schemas.microsoft.com/office/drawing/2014/main" id="{0EB98B69-A134-5E31-5026-3C583386B7B3}"/>
+              </a:ext>
+            </a:extLst>
+          </p:cNvPr>
+          <p:cNvGrpSpPr/>
+          <p:nvPr/>
+        </p:nvGrpSpPr>
+        <p:grpSpPr>
+          <a:xfrm>
+            <a:off x="13335000" y="9253126"/>
+            <a:ext cx="3918346" cy="670011"/>
+            <a:chOff x="0" y="-66675"/>
+            <a:chExt cx="4327267" cy="893347"/>
+          </a:xfrm>
+        </p:grpSpPr>
+        <p:sp>
+          <p:nvSpPr>
+            <p:cNvPr id="145" name="TextBox 18">
+              <a:extLst>
+                <a:ext uri="{FF2B5EF4-FFF2-40B4-BE49-F238E27FC236}">
+                  <a16:creationId xmlns:a16="http://schemas.microsoft.com/office/drawing/2014/main" id="{91902813-FC5B-3874-FB8F-C3596B1FC2A0}"/>
+                </a:ext>
+              </a:extLst>
+            </p:cNvPr>
+            <p:cNvSpPr txBox="1"/>
+            <p:nvPr/>
+          </p:nvSpPr>
+          <p:spPr>
+            <a:xfrm>
+              <a:off x="0" y="20383"/>
+              <a:ext cx="3493131" cy="806289"/>
+            </a:xfrm>
+            <a:prstGeom prst="rect">
+              <a:avLst/>
+            </a:prstGeom>
+          </p:spPr>
+          <p:txBody>
+            <a:bodyPr lIns="0" tIns="0" rIns="0" bIns="0" rtlCol="0" anchor="t">
+              <a:spAutoFit/>
+            </a:bodyPr>
+            <a:lstStyle/>
+            <a:p>
+              <a:pPr algn="l">
+                <a:lnSpc>
+                  <a:spcPts val="2416"/>
+                </a:lnSpc>
+              </a:pPr>
+              <a:r>
+                <a:rPr lang="en-US" sz="1726" b="1" dirty="0">
+                  <a:solidFill>
+                    <a:srgbClr val="343434"/>
+                  </a:solidFill>
+                  <a:latin typeface="Coco Gothic Heavy"/>
+                  <a:ea typeface="Coco Gothic Heavy"/>
+                  <a:cs typeface="Coco Gothic Heavy"/>
+                  <a:sym typeface="Coco Gothic Heavy"/>
+                </a:rPr>
+                <a:t>APPLICATION PROPOSAL</a:t>
+              </a:r>
+            </a:p>
+          </p:txBody>
+        </p:sp>
+        <p:sp>
+          <p:nvSpPr>
+            <p:cNvPr id="146" name="TextBox 19">
+              <a:extLst>
+                <a:ext uri="{FF2B5EF4-FFF2-40B4-BE49-F238E27FC236}">
+                  <a16:creationId xmlns:a16="http://schemas.microsoft.com/office/drawing/2014/main" id="{E9C25732-FCD0-8FB8-E8A5-19113D131CA8}"/>
+                </a:ext>
+              </a:extLst>
+            </p:cNvPr>
+            <p:cNvSpPr txBox="1"/>
+            <p:nvPr/>
+          </p:nvSpPr>
+          <p:spPr>
+            <a:xfrm>
+              <a:off x="3530953" y="-66675"/>
+              <a:ext cx="796314" cy="571288"/>
+            </a:xfrm>
+            <a:prstGeom prst="rect">
+              <a:avLst/>
+            </a:prstGeom>
+          </p:spPr>
+          <p:txBody>
+            <a:bodyPr lIns="0" tIns="0" rIns="0" bIns="0" rtlCol="0" anchor="t">
+              <a:spAutoFit/>
+            </a:bodyPr>
+            <a:lstStyle/>
+            <a:p>
+              <a:pPr algn="ctr">
+                <a:lnSpc>
+                  <a:spcPts val="3499"/>
+                </a:lnSpc>
+              </a:pPr>
+              <a:r>
+                <a:rPr lang="en-US" sz="2499" b="1" dirty="0">
+                  <a:solidFill>
+                    <a:srgbClr val="343434"/>
+                  </a:solidFill>
+                  <a:latin typeface="Coco Gothic Heavy"/>
+                  <a:ea typeface="Coco Gothic Heavy"/>
+                  <a:cs typeface="Coco Gothic Heavy"/>
+                  <a:sym typeface="Coco Gothic Heavy"/>
+                </a:rPr>
+                <a:t>18</a:t>
+              </a:r>
+            </a:p>
+          </p:txBody>
+        </p:sp>
+        <p:sp>
+          <p:nvSpPr>
+            <p:cNvPr id="147" name="AutoShape 20">
+              <a:extLst>
+                <a:ext uri="{FF2B5EF4-FFF2-40B4-BE49-F238E27FC236}">
+                  <a16:creationId xmlns:a16="http://schemas.microsoft.com/office/drawing/2014/main" id="{0CBD98FE-E0B4-8745-A884-23553607BF3A}"/>
+                </a:ext>
+              </a:extLst>
+            </p:cNvPr>
+            <p:cNvSpPr/>
+            <p:nvPr/>
+          </p:nvSpPr>
+          <p:spPr>
+            <a:xfrm>
+              <a:off x="3493131" y="20147"/>
+              <a:ext cx="0" cy="405967"/>
+            </a:xfrm>
+            <a:prstGeom prst="line">
+              <a:avLst/>
+            </a:prstGeom>
+            <a:ln w="50800" cap="flat">
+              <a:solidFill>
+                <a:schemeClr val="tx2">
+                  <a:lumMod val="40000"/>
+                  <a:lumOff val="60000"/>
+                </a:schemeClr>
+              </a:solidFill>
+              <a:prstDash val="solid"/>
+              <a:headEnd type="none" w="sm" len="sm"/>
+              <a:tailEnd type="none" w="sm" len="sm"/>
+            </a:ln>
+          </p:spPr>
+          <p:txBody>
+            <a:bodyPr/>
+            <a:lstStyle/>
+            <a:p>
+              <a:endParaRPr lang="en-ID"/>
+            </a:p>
+          </p:txBody>
+        </p:sp>
+      </p:grpSp>
+    </p:spTree>
+    <p:extLst>
+      <p:ext uri="{BB962C8B-B14F-4D97-AF65-F5344CB8AC3E}">
+        <p14:creationId xmlns:p14="http://schemas.microsoft.com/office/powerpoint/2010/main" val="3745826851"/>
+      </p:ext>
+    </p:extLst>
+  </p:cSld>
+  <p:clrMapOvr>
+    <a:masterClrMapping/>
+  </p:clrMapOvr>
+</p:sld>
+</file>
+
+<file path=ppt/slides/slide19.xml><?xml version="1.0" encoding="utf-8"?>
+<p:sld xmlns:a="http://schemas.openxmlformats.org/drawingml/2006/main" xmlns:r="http://schemas.openxmlformats.org/officeDocument/2006/relationships" xmlns:p="http://schemas.openxmlformats.org/presentationml/2006/main">
+  <p:cSld>
     <p:bg>
       <p:bgPr>
         <a:solidFill>
@@ -15974,7 +16639,7 @@
                   <a:cs typeface="Coco Gothic Heavy"/>
                   <a:sym typeface="Coco Gothic Heavy"/>
                 </a:rPr>
-                <a:t>18</a:t>
+                <a:t>19</a:t>
               </a:r>
             </a:p>
           </p:txBody>
@@ -16021,811 +16686,6 @@
         </p:sp>
       </p:grpSp>
     </p:spTree>
-  </p:cSld>
-  <p:clrMapOvr>
-    <a:masterClrMapping/>
-  </p:clrMapOvr>
-</p:sld>
-</file>
-
-<file path=ppt/slides/slide19.xml><?xml version="1.0" encoding="utf-8"?>
-<p:sld xmlns:a="http://schemas.openxmlformats.org/drawingml/2006/main" xmlns:r="http://schemas.openxmlformats.org/officeDocument/2006/relationships" xmlns:p="http://schemas.openxmlformats.org/presentationml/2006/main">
-  <p:cSld>
-    <p:bg>
-      <p:bgPr>
-        <a:solidFill>
-          <a:schemeClr val="tx2">
-            <a:lumMod val="20000"/>
-            <a:lumOff val="80000"/>
-          </a:schemeClr>
-        </a:solidFill>
-        <a:effectLst/>
-      </p:bgPr>
-    </p:bg>
-    <p:spTree>
-      <p:nvGrpSpPr>
-        <p:cNvPr id="1" name="">
-          <a:extLst>
-            <a:ext uri="{FF2B5EF4-FFF2-40B4-BE49-F238E27FC236}">
-              <a16:creationId xmlns:a16="http://schemas.microsoft.com/office/drawing/2014/main" id="{D04F8597-B8D5-F587-CF63-9BBA02E1FEE4}"/>
-            </a:ext>
-          </a:extLst>
-        </p:cNvPr>
-        <p:cNvGrpSpPr/>
-        <p:nvPr/>
-      </p:nvGrpSpPr>
-      <p:grpSpPr>
-        <a:xfrm>
-          <a:off x="0" y="0"/>
-          <a:ext cx="0" cy="0"/>
-          <a:chOff x="0" y="0"/>
-          <a:chExt cx="0" cy="0"/>
-        </a:xfrm>
-      </p:grpSpPr>
-      <p:grpSp>
-        <p:nvGrpSpPr>
-          <p:cNvPr id="9" name="Group 9">
-            <a:extLst>
-              <a:ext uri="{FF2B5EF4-FFF2-40B4-BE49-F238E27FC236}">
-                <a16:creationId xmlns:a16="http://schemas.microsoft.com/office/drawing/2014/main" id="{D67BD128-A5B3-8806-9C53-010092F73098}"/>
-              </a:ext>
-            </a:extLst>
-          </p:cNvPr>
-          <p:cNvGrpSpPr/>
-          <p:nvPr/>
-        </p:nvGrpSpPr>
-        <p:grpSpPr>
-          <a:xfrm>
-            <a:off x="7470309" y="3432372"/>
-            <a:ext cx="63671" cy="3422255"/>
-            <a:chOff x="0" y="0"/>
-            <a:chExt cx="16769" cy="901335"/>
-          </a:xfrm>
-        </p:grpSpPr>
-        <p:sp>
-          <p:nvSpPr>
-            <p:cNvPr id="10" name="Freeform 10">
-              <a:extLst>
-                <a:ext uri="{FF2B5EF4-FFF2-40B4-BE49-F238E27FC236}">
-                  <a16:creationId xmlns:a16="http://schemas.microsoft.com/office/drawing/2014/main" id="{37EBC445-B775-8E07-F6C9-4BDE96CDCAE9}"/>
-                </a:ext>
-              </a:extLst>
-            </p:cNvPr>
-            <p:cNvSpPr/>
-            <p:nvPr/>
-          </p:nvSpPr>
-          <p:spPr>
-            <a:xfrm>
-              <a:off x="0" y="0"/>
-              <a:ext cx="16769" cy="901335"/>
-            </a:xfrm>
-            <a:custGeom>
-              <a:avLst/>
-              <a:gdLst/>
-              <a:ahLst/>
-              <a:cxnLst/>
-              <a:rect l="l" t="t" r="r" b="b"/>
-              <a:pathLst>
-                <a:path w="16769" h="901335">
-                  <a:moveTo>
-                    <a:pt x="0" y="0"/>
-                  </a:moveTo>
-                  <a:lnTo>
-                    <a:pt x="16769" y="0"/>
-                  </a:lnTo>
-                  <a:lnTo>
-                    <a:pt x="16769" y="901335"/>
-                  </a:lnTo>
-                  <a:lnTo>
-                    <a:pt x="0" y="901335"/>
-                  </a:lnTo>
-                  <a:close/>
-                </a:path>
-              </a:pathLst>
-            </a:custGeom>
-            <a:solidFill>
-              <a:srgbClr val="FFFFFF"/>
-            </a:solidFill>
-          </p:spPr>
-          <p:txBody>
-            <a:bodyPr/>
-            <a:lstStyle/>
-            <a:p>
-              <a:endParaRPr lang="en-ID"/>
-            </a:p>
-          </p:txBody>
-        </p:sp>
-        <p:sp>
-          <p:nvSpPr>
-            <p:cNvPr id="11" name="TextBox 11">
-              <a:extLst>
-                <a:ext uri="{FF2B5EF4-FFF2-40B4-BE49-F238E27FC236}">
-                  <a16:creationId xmlns:a16="http://schemas.microsoft.com/office/drawing/2014/main" id="{C07C6DDB-7616-46F6-1151-26DF5F422FB8}"/>
-                </a:ext>
-              </a:extLst>
-            </p:cNvPr>
-            <p:cNvSpPr txBox="1"/>
-            <p:nvPr/>
-          </p:nvSpPr>
-          <p:spPr>
-            <a:xfrm>
-              <a:off x="0" y="-57150"/>
-              <a:ext cx="16769" cy="958485"/>
-            </a:xfrm>
-            <a:prstGeom prst="rect">
-              <a:avLst/>
-            </a:prstGeom>
-          </p:spPr>
-          <p:txBody>
-            <a:bodyPr lIns="50800" tIns="50800" rIns="50800" bIns="50800" rtlCol="0" anchor="ctr"/>
-            <a:lstStyle/>
-            <a:p>
-              <a:pPr algn="ctr">
-                <a:lnSpc>
-                  <a:spcPts val="2659"/>
-                </a:lnSpc>
-                <a:spcBef>
-                  <a:spcPct val="0"/>
-                </a:spcBef>
-              </a:pPr>
-              <a:endParaRPr/>
-            </a:p>
-          </p:txBody>
-        </p:sp>
-      </p:grpSp>
-      <p:sp>
-        <p:nvSpPr>
-          <p:cNvPr id="12" name="Freeform 12">
-            <a:extLst>
-              <a:ext uri="{FF2B5EF4-FFF2-40B4-BE49-F238E27FC236}">
-                <a16:creationId xmlns:a16="http://schemas.microsoft.com/office/drawing/2014/main" id="{9DA113F2-8BF7-971B-217D-86FAE75195CF}"/>
-              </a:ext>
-            </a:extLst>
-          </p:cNvPr>
-          <p:cNvSpPr/>
-          <p:nvPr/>
-        </p:nvSpPr>
-        <p:spPr>
-          <a:xfrm>
-            <a:off x="-299501" y="8580145"/>
-            <a:ext cx="3711297" cy="1356310"/>
-          </a:xfrm>
-          <a:custGeom>
-            <a:avLst/>
-            <a:gdLst/>
-            <a:ahLst/>
-            <a:cxnLst/>
-            <a:rect l="l" t="t" r="r" b="b"/>
-            <a:pathLst>
-              <a:path w="3711297" h="1356310">
-                <a:moveTo>
-                  <a:pt x="0" y="0"/>
-                </a:moveTo>
-                <a:lnTo>
-                  <a:pt x="3711297" y="0"/>
-                </a:lnTo>
-                <a:lnTo>
-                  <a:pt x="3711297" y="1356310"/>
-                </a:lnTo>
-                <a:lnTo>
-                  <a:pt x="0" y="1356310"/>
-                </a:lnTo>
-                <a:lnTo>
-                  <a:pt x="0" y="0"/>
-                </a:lnTo>
-                <a:close/>
-              </a:path>
-            </a:pathLst>
-          </a:custGeom>
-          <a:blipFill>
-            <a:blip r:embed="rId2">
-              <a:extLst>
-                <a:ext uri="{96DAC541-7B7A-43D3-8B79-37D633B846F1}">
-                  <asvg:svgBlip xmlns:asvg="http://schemas.microsoft.com/office/drawing/2016/SVG/main" r:embed="rId3"/>
-                </a:ext>
-              </a:extLst>
-            </a:blip>
-            <a:stretch>
-              <a:fillRect/>
-            </a:stretch>
-          </a:blipFill>
-        </p:spPr>
-        <p:txBody>
-          <a:bodyPr/>
-          <a:lstStyle/>
-          <a:p>
-            <a:endParaRPr lang="en-ID"/>
-          </a:p>
-        </p:txBody>
-      </p:sp>
-      <p:sp>
-        <p:nvSpPr>
-          <p:cNvPr id="13" name="Freeform 13">
-            <a:extLst>
-              <a:ext uri="{FF2B5EF4-FFF2-40B4-BE49-F238E27FC236}">
-                <a16:creationId xmlns:a16="http://schemas.microsoft.com/office/drawing/2014/main" id="{1DB0EB03-5DE5-E4D1-16DD-CCBEA7900F35}"/>
-              </a:ext>
-            </a:extLst>
-          </p:cNvPr>
-          <p:cNvSpPr/>
-          <p:nvPr/>
-        </p:nvSpPr>
-        <p:spPr>
-          <a:xfrm>
-            <a:off x="14874375" y="350545"/>
-            <a:ext cx="3711297" cy="1356310"/>
-          </a:xfrm>
-          <a:custGeom>
-            <a:avLst/>
-            <a:gdLst/>
-            <a:ahLst/>
-            <a:cxnLst/>
-            <a:rect l="l" t="t" r="r" b="b"/>
-            <a:pathLst>
-              <a:path w="3711297" h="1356310">
-                <a:moveTo>
-                  <a:pt x="0" y="0"/>
-                </a:moveTo>
-                <a:lnTo>
-                  <a:pt x="3711297" y="0"/>
-                </a:lnTo>
-                <a:lnTo>
-                  <a:pt x="3711297" y="1356310"/>
-                </a:lnTo>
-                <a:lnTo>
-                  <a:pt x="0" y="1356310"/>
-                </a:lnTo>
-                <a:lnTo>
-                  <a:pt x="0" y="0"/>
-                </a:lnTo>
-                <a:close/>
-              </a:path>
-            </a:pathLst>
-          </a:custGeom>
-          <a:blipFill>
-            <a:blip r:embed="rId2">
-              <a:extLst>
-                <a:ext uri="{96DAC541-7B7A-43D3-8B79-37D633B846F1}">
-                  <asvg:svgBlip xmlns:asvg="http://schemas.microsoft.com/office/drawing/2016/SVG/main" r:embed="rId3"/>
-                </a:ext>
-              </a:extLst>
-            </a:blip>
-            <a:stretch>
-              <a:fillRect/>
-            </a:stretch>
-          </a:blipFill>
-        </p:spPr>
-        <p:txBody>
-          <a:bodyPr/>
-          <a:lstStyle/>
-          <a:p>
-            <a:endParaRPr lang="en-ID"/>
-          </a:p>
-        </p:txBody>
-      </p:sp>
-      <p:sp>
-        <p:nvSpPr>
-          <p:cNvPr id="14" name="Freeform 14">
-            <a:extLst>
-              <a:ext uri="{FF2B5EF4-FFF2-40B4-BE49-F238E27FC236}">
-                <a16:creationId xmlns:a16="http://schemas.microsoft.com/office/drawing/2014/main" id="{D98D5AED-F503-A4B7-A23E-3B950B07A373}"/>
-              </a:ext>
-            </a:extLst>
-          </p:cNvPr>
-          <p:cNvSpPr/>
-          <p:nvPr/>
-        </p:nvSpPr>
-        <p:spPr>
-          <a:xfrm>
-            <a:off x="1578616" y="6526482"/>
-            <a:ext cx="3666360" cy="2486459"/>
-          </a:xfrm>
-          <a:custGeom>
-            <a:avLst/>
-            <a:gdLst/>
-            <a:ahLst/>
-            <a:cxnLst/>
-            <a:rect l="l" t="t" r="r" b="b"/>
-            <a:pathLst>
-              <a:path w="3666360" h="2486459">
-                <a:moveTo>
-                  <a:pt x="0" y="0"/>
-                </a:moveTo>
-                <a:lnTo>
-                  <a:pt x="3666360" y="0"/>
-                </a:lnTo>
-                <a:lnTo>
-                  <a:pt x="3666360" y="2486458"/>
-                </a:lnTo>
-                <a:lnTo>
-                  <a:pt x="0" y="2486458"/>
-                </a:lnTo>
-                <a:lnTo>
-                  <a:pt x="0" y="0"/>
-                </a:lnTo>
-                <a:close/>
-              </a:path>
-            </a:pathLst>
-          </a:custGeom>
-          <a:blipFill>
-            <a:blip r:embed="rId4">
-              <a:duotone>
-                <a:prstClr val="black"/>
-                <a:schemeClr val="accent1">
-                  <a:tint val="45000"/>
-                  <a:satMod val="400000"/>
-                </a:schemeClr>
-              </a:duotone>
-              <a:extLst>
-                <a:ext uri="{96DAC541-7B7A-43D3-8B79-37D633B846F1}">
-                  <asvg:svgBlip xmlns:asvg="http://schemas.microsoft.com/office/drawing/2016/SVG/main" r:embed="rId5"/>
-                </a:ext>
-              </a:extLst>
-            </a:blip>
-            <a:stretch>
-              <a:fillRect/>
-            </a:stretch>
-          </a:blipFill>
-        </p:spPr>
-        <p:txBody>
-          <a:bodyPr/>
-          <a:lstStyle/>
-          <a:p>
-            <a:endParaRPr lang="en-ID"/>
-          </a:p>
-        </p:txBody>
-      </p:sp>
-      <p:sp>
-        <p:nvSpPr>
-          <p:cNvPr id="15" name="TextBox 15">
-            <a:extLst>
-              <a:ext uri="{FF2B5EF4-FFF2-40B4-BE49-F238E27FC236}">
-                <a16:creationId xmlns:a16="http://schemas.microsoft.com/office/drawing/2014/main" id="{3979171B-F05E-429F-EF52-BEDB38A738A5}"/>
-              </a:ext>
-            </a:extLst>
-          </p:cNvPr>
-          <p:cNvSpPr txBox="1"/>
-          <p:nvPr/>
-        </p:nvSpPr>
-        <p:spPr>
-          <a:xfrm>
-            <a:off x="1828447" y="4699635"/>
-            <a:ext cx="5485491" cy="2592697"/>
-          </a:xfrm>
-          <a:prstGeom prst="rect">
-            <a:avLst/>
-          </a:prstGeom>
-        </p:spPr>
-        <p:txBody>
-          <a:bodyPr lIns="0" tIns="0" rIns="0" bIns="0" rtlCol="0" anchor="t">
-            <a:spAutoFit/>
-          </a:bodyPr>
-          <a:lstStyle/>
-          <a:p>
-            <a:pPr algn="ctr">
-              <a:lnSpc>
-                <a:spcPts val="6660"/>
-              </a:lnSpc>
-            </a:pPr>
-            <a:r>
-              <a:rPr lang="en-US" sz="6000" b="1" dirty="0">
-                <a:latin typeface="Coco Gothic Heavy"/>
-                <a:ea typeface="Coco Gothic Heavy"/>
-                <a:cs typeface="Coco Gothic Heavy"/>
-                <a:sym typeface="Coco Gothic Heavy"/>
-              </a:rPr>
-              <a:t>Why you should hire me</a:t>
-            </a:r>
-          </a:p>
-        </p:txBody>
-      </p:sp>
-      <p:sp>
-        <p:nvSpPr>
-          <p:cNvPr id="16" name="TextBox 16">
-            <a:extLst>
-              <a:ext uri="{FF2B5EF4-FFF2-40B4-BE49-F238E27FC236}">
-                <a16:creationId xmlns:a16="http://schemas.microsoft.com/office/drawing/2014/main" id="{03A70665-10D9-FE2D-734E-6703381E5366}"/>
-              </a:ext>
-            </a:extLst>
-          </p:cNvPr>
-          <p:cNvSpPr txBox="1"/>
-          <p:nvPr/>
-        </p:nvSpPr>
-        <p:spPr>
-          <a:xfrm>
-            <a:off x="8164249" y="3516313"/>
-            <a:ext cx="7894928" cy="3572773"/>
-          </a:xfrm>
-          <a:prstGeom prst="rect">
-            <a:avLst/>
-          </a:prstGeom>
-        </p:spPr>
-        <p:txBody>
-          <a:bodyPr lIns="0" tIns="0" rIns="0" bIns="0" rtlCol="0" anchor="t">
-            <a:spAutoFit/>
-          </a:bodyPr>
-          <a:lstStyle/>
-          <a:p>
-            <a:pPr algn="just">
-              <a:lnSpc>
-                <a:spcPts val="2800"/>
-              </a:lnSpc>
-            </a:pPr>
-            <a:r>
-              <a:rPr lang="en-US" sz="2000" dirty="0">
-                <a:latin typeface="Poppins"/>
-                <a:ea typeface="Poppins"/>
-                <a:cs typeface="Poppins"/>
-                <a:sym typeface="Poppins"/>
-              </a:rPr>
-              <a:t>There are a lot of Fullstack engineers in Indonesia and maybe a lot of them are in a better skills, but I guarantee that I am the one with the fastest skill development among all of them. The reason is, beside of the fact that I am smart and so enthusiastic with Software Engineering, I also have a long history of preparing my self to be an IT Entrepreneur. That builds the now-me who are fast-learner and highly-dedicated. You can give me the opportunity to be Cofounding Fullstack Engineer Intern for your company, I will show how eligible I am for Cofounding Fullstack Engineer position.</a:t>
-            </a:r>
-          </a:p>
-        </p:txBody>
-      </p:sp>
-      <p:sp>
-        <p:nvSpPr>
-          <p:cNvPr id="17" name="Freeform 17">
-            <a:extLst>
-              <a:ext uri="{FF2B5EF4-FFF2-40B4-BE49-F238E27FC236}">
-                <a16:creationId xmlns:a16="http://schemas.microsoft.com/office/drawing/2014/main" id="{A9CE591B-0A59-7290-F9DE-7547A745F4C8}"/>
-              </a:ext>
-            </a:extLst>
-          </p:cNvPr>
-          <p:cNvSpPr/>
-          <p:nvPr/>
-        </p:nvSpPr>
-        <p:spPr>
-          <a:xfrm rot="-10800000">
-            <a:off x="13665094" y="1209693"/>
-            <a:ext cx="2418563" cy="1640225"/>
-          </a:xfrm>
-          <a:custGeom>
-            <a:avLst/>
-            <a:gdLst/>
-            <a:ahLst/>
-            <a:cxnLst/>
-            <a:rect l="l" t="t" r="r" b="b"/>
-            <a:pathLst>
-              <a:path w="2418563" h="1640225">
-                <a:moveTo>
-                  <a:pt x="0" y="0"/>
-                </a:moveTo>
-                <a:lnTo>
-                  <a:pt x="2418563" y="0"/>
-                </a:lnTo>
-                <a:lnTo>
-                  <a:pt x="2418563" y="1640225"/>
-                </a:lnTo>
-                <a:lnTo>
-                  <a:pt x="0" y="1640225"/>
-                </a:lnTo>
-                <a:lnTo>
-                  <a:pt x="0" y="0"/>
-                </a:lnTo>
-                <a:close/>
-              </a:path>
-            </a:pathLst>
-          </a:custGeom>
-          <a:blipFill>
-            <a:blip r:embed="rId4">
-              <a:duotone>
-                <a:schemeClr val="accent1">
-                  <a:shade val="45000"/>
-                  <a:satMod val="135000"/>
-                </a:schemeClr>
-                <a:prstClr val="white"/>
-              </a:duotone>
-              <a:extLst>
-                <a:ext uri="{96DAC541-7B7A-43D3-8B79-37D633B846F1}">
-                  <asvg:svgBlip xmlns:asvg="http://schemas.microsoft.com/office/drawing/2016/SVG/main" r:embed="rId5"/>
-                </a:ext>
-              </a:extLst>
-            </a:blip>
-            <a:stretch>
-              <a:fillRect/>
-            </a:stretch>
-          </a:blipFill>
-        </p:spPr>
-        <p:txBody>
-          <a:bodyPr/>
-          <a:lstStyle/>
-          <a:p>
-            <a:endParaRPr lang="en-ID" dirty="0"/>
-          </a:p>
-        </p:txBody>
-      </p:sp>
-      <p:sp>
-        <p:nvSpPr>
-          <p:cNvPr id="18" name="TextBox 3">
-            <a:extLst>
-              <a:ext uri="{FF2B5EF4-FFF2-40B4-BE49-F238E27FC236}">
-                <a16:creationId xmlns:a16="http://schemas.microsoft.com/office/drawing/2014/main" id="{BBF7C67D-F9A3-D258-4B94-935E91A01C71}"/>
-              </a:ext>
-            </a:extLst>
-          </p:cNvPr>
-          <p:cNvSpPr txBox="1"/>
-          <p:nvPr/>
-        </p:nvSpPr>
-        <p:spPr>
-          <a:xfrm>
-            <a:off x="1395892" y="691659"/>
-            <a:ext cx="1565938" cy="260841"/>
-          </a:xfrm>
-          <a:prstGeom prst="rect">
-            <a:avLst/>
-          </a:prstGeom>
-        </p:spPr>
-        <p:txBody>
-          <a:bodyPr lIns="0" tIns="0" rIns="0" bIns="0" rtlCol="0" anchor="t">
-            <a:spAutoFit/>
-          </a:bodyPr>
-          <a:lstStyle/>
-          <a:p>
-            <a:pPr>
-              <a:lnSpc>
-                <a:spcPts val="1652"/>
-              </a:lnSpc>
-            </a:pPr>
-            <a:r>
-              <a:rPr lang="en-US" sz="2800" b="1" dirty="0">
-                <a:solidFill>
-                  <a:srgbClr val="343434"/>
-                </a:solidFill>
-                <a:latin typeface="Coco Gothic"/>
-                <a:ea typeface="Coco Gothic"/>
-                <a:cs typeface="Coco Gothic"/>
-                <a:sym typeface="Coco Gothic"/>
-              </a:rPr>
-              <a:t>Yinni</a:t>
-            </a:r>
-          </a:p>
-        </p:txBody>
-      </p:sp>
-      <p:sp>
-        <p:nvSpPr>
-          <p:cNvPr id="19" name="TextBox 4">
-            <a:extLst>
-              <a:ext uri="{FF2B5EF4-FFF2-40B4-BE49-F238E27FC236}">
-                <a16:creationId xmlns:a16="http://schemas.microsoft.com/office/drawing/2014/main" id="{CEB59037-E571-4614-C14D-F62CCDBE13F7}"/>
-              </a:ext>
-            </a:extLst>
-          </p:cNvPr>
-          <p:cNvSpPr txBox="1"/>
-          <p:nvPr/>
-        </p:nvSpPr>
-        <p:spPr>
-          <a:xfrm>
-            <a:off x="1394542" y="880543"/>
-            <a:ext cx="3329858" cy="224357"/>
-          </a:xfrm>
-          <a:prstGeom prst="rect">
-            <a:avLst/>
-          </a:prstGeom>
-        </p:spPr>
-        <p:txBody>
-          <a:bodyPr wrap="square" lIns="0" tIns="0" rIns="0" bIns="0" rtlCol="0" anchor="t">
-            <a:spAutoFit/>
-          </a:bodyPr>
-          <a:lstStyle/>
-          <a:p>
-            <a:pPr>
-              <a:lnSpc>
-                <a:spcPts val="1654"/>
-              </a:lnSpc>
-            </a:pPr>
-            <a:r>
-              <a:rPr lang="en-US" sz="1654" b="1" spc="198" dirty="0">
-                <a:solidFill>
-                  <a:srgbClr val="343434"/>
-                </a:solidFill>
-                <a:latin typeface="Coco Gothic Bold"/>
-                <a:ea typeface="Coco Gothic Bold"/>
-                <a:cs typeface="Coco Gothic Bold"/>
-                <a:sym typeface="Coco Gothic Bold"/>
-              </a:rPr>
-              <a:t>AI-Assisted Shopping</a:t>
-            </a:r>
-          </a:p>
-        </p:txBody>
-      </p:sp>
-      <p:pic>
-        <p:nvPicPr>
-          <p:cNvPr id="20" name="Picture 19">
-            <a:extLst>
-              <a:ext uri="{FF2B5EF4-FFF2-40B4-BE49-F238E27FC236}">
-                <a16:creationId xmlns:a16="http://schemas.microsoft.com/office/drawing/2014/main" id="{3A7ABEBC-7A51-1472-63F8-6D37C9DCF740}"/>
-              </a:ext>
-            </a:extLst>
-          </p:cNvPr>
-          <p:cNvPicPr>
-            <a:picLocks noChangeAspect="1"/>
-          </p:cNvPicPr>
-          <p:nvPr/>
-        </p:nvPicPr>
-        <p:blipFill>
-          <a:blip r:embed="rId6" cstate="print">
-            <a:extLst>
-              <a:ext uri="{28A0092B-C50C-407E-A947-70E740481C1C}">
-                <a14:useLocalDpi xmlns:a14="http://schemas.microsoft.com/office/drawing/2010/main" val="0"/>
-              </a:ext>
-            </a:extLst>
-          </a:blip>
-          <a:stretch>
-            <a:fillRect/>
-          </a:stretch>
-        </p:blipFill>
-        <p:spPr>
-          <a:xfrm>
-            <a:off x="644350" y="397507"/>
-            <a:ext cx="859793" cy="859793"/>
-          </a:xfrm>
-          <a:prstGeom prst="rect">
-            <a:avLst/>
-          </a:prstGeom>
-        </p:spPr>
-      </p:pic>
-      <p:grpSp>
-        <p:nvGrpSpPr>
-          <p:cNvPr id="25" name="Group 17">
-            <a:extLst>
-              <a:ext uri="{FF2B5EF4-FFF2-40B4-BE49-F238E27FC236}">
-                <a16:creationId xmlns:a16="http://schemas.microsoft.com/office/drawing/2014/main" id="{16E5BFF1-322D-4FBF-F2B9-DB6354E09CC9}"/>
-              </a:ext>
-            </a:extLst>
-          </p:cNvPr>
-          <p:cNvGrpSpPr/>
-          <p:nvPr/>
-        </p:nvGrpSpPr>
-        <p:grpSpPr>
-          <a:xfrm>
-            <a:off x="13335000" y="9253126"/>
-            <a:ext cx="3918346" cy="670011"/>
-            <a:chOff x="0" y="-66675"/>
-            <a:chExt cx="4327267" cy="893347"/>
-          </a:xfrm>
-        </p:grpSpPr>
-        <p:sp>
-          <p:nvSpPr>
-            <p:cNvPr id="26" name="TextBox 18">
-              <a:extLst>
-                <a:ext uri="{FF2B5EF4-FFF2-40B4-BE49-F238E27FC236}">
-                  <a16:creationId xmlns:a16="http://schemas.microsoft.com/office/drawing/2014/main" id="{8090FE41-F24A-9FF9-6678-0181299A1A43}"/>
-                </a:ext>
-              </a:extLst>
-            </p:cNvPr>
-            <p:cNvSpPr txBox="1"/>
-            <p:nvPr/>
-          </p:nvSpPr>
-          <p:spPr>
-            <a:xfrm>
-              <a:off x="0" y="20383"/>
-              <a:ext cx="3493131" cy="806289"/>
-            </a:xfrm>
-            <a:prstGeom prst="rect">
-              <a:avLst/>
-            </a:prstGeom>
-          </p:spPr>
-          <p:txBody>
-            <a:bodyPr lIns="0" tIns="0" rIns="0" bIns="0" rtlCol="0" anchor="t">
-              <a:spAutoFit/>
-            </a:bodyPr>
-            <a:lstStyle/>
-            <a:p>
-              <a:pPr algn="l">
-                <a:lnSpc>
-                  <a:spcPts val="2416"/>
-                </a:lnSpc>
-              </a:pPr>
-              <a:r>
-                <a:rPr lang="en-US" sz="1726" b="1" dirty="0">
-                  <a:solidFill>
-                    <a:srgbClr val="343434"/>
-                  </a:solidFill>
-                  <a:latin typeface="Coco Gothic Heavy"/>
-                  <a:ea typeface="Coco Gothic Heavy"/>
-                  <a:cs typeface="Coco Gothic Heavy"/>
-                  <a:sym typeface="Coco Gothic Heavy"/>
-                </a:rPr>
-                <a:t>APPLICATION PROPOSAL</a:t>
-              </a:r>
-            </a:p>
-          </p:txBody>
-        </p:sp>
-        <p:sp>
-          <p:nvSpPr>
-            <p:cNvPr id="27" name="TextBox 19">
-              <a:extLst>
-                <a:ext uri="{FF2B5EF4-FFF2-40B4-BE49-F238E27FC236}">
-                  <a16:creationId xmlns:a16="http://schemas.microsoft.com/office/drawing/2014/main" id="{8438B72C-EE94-CBBB-3BA6-CEE68AD0E037}"/>
-                </a:ext>
-              </a:extLst>
-            </p:cNvPr>
-            <p:cNvSpPr txBox="1"/>
-            <p:nvPr/>
-          </p:nvSpPr>
-          <p:spPr>
-            <a:xfrm>
-              <a:off x="3530953" y="-66675"/>
-              <a:ext cx="796314" cy="571288"/>
-            </a:xfrm>
-            <a:prstGeom prst="rect">
-              <a:avLst/>
-            </a:prstGeom>
-          </p:spPr>
-          <p:txBody>
-            <a:bodyPr lIns="0" tIns="0" rIns="0" bIns="0" rtlCol="0" anchor="t">
-              <a:spAutoFit/>
-            </a:bodyPr>
-            <a:lstStyle/>
-            <a:p>
-              <a:pPr algn="ctr">
-                <a:lnSpc>
-                  <a:spcPts val="3499"/>
-                </a:lnSpc>
-              </a:pPr>
-              <a:r>
-                <a:rPr lang="en-US" sz="2499" b="1" dirty="0">
-                  <a:solidFill>
-                    <a:srgbClr val="343434"/>
-                  </a:solidFill>
-                  <a:latin typeface="Coco Gothic Heavy"/>
-                  <a:ea typeface="Coco Gothic Heavy"/>
-                  <a:cs typeface="Coco Gothic Heavy"/>
-                  <a:sym typeface="Coco Gothic Heavy"/>
-                </a:rPr>
-                <a:t>19</a:t>
-              </a:r>
-            </a:p>
-          </p:txBody>
-        </p:sp>
-        <p:sp>
-          <p:nvSpPr>
-            <p:cNvPr id="28" name="AutoShape 20">
-              <a:extLst>
-                <a:ext uri="{FF2B5EF4-FFF2-40B4-BE49-F238E27FC236}">
-                  <a16:creationId xmlns:a16="http://schemas.microsoft.com/office/drawing/2014/main" id="{831CCD2C-C106-55F1-A52F-CADDEA4DA5D8}"/>
-                </a:ext>
-              </a:extLst>
-            </p:cNvPr>
-            <p:cNvSpPr/>
-            <p:nvPr/>
-          </p:nvSpPr>
-          <p:spPr>
-            <a:xfrm>
-              <a:off x="3493131" y="20147"/>
-              <a:ext cx="0" cy="405967"/>
-            </a:xfrm>
-            <a:prstGeom prst="line">
-              <a:avLst/>
-            </a:prstGeom>
-            <a:ln w="50800" cap="flat">
-              <a:solidFill>
-                <a:schemeClr val="tx2">
-                  <a:lumMod val="40000"/>
-                  <a:lumOff val="60000"/>
-                </a:schemeClr>
-              </a:solidFill>
-              <a:prstDash val="solid"/>
-              <a:headEnd type="none" w="sm" len="sm"/>
-              <a:tailEnd type="none" w="sm" len="sm"/>
-            </a:ln>
-          </p:spPr>
-          <p:txBody>
-            <a:bodyPr/>
-            <a:lstStyle/>
-            <a:p>
-              <a:endParaRPr lang="en-ID"/>
-            </a:p>
-          </p:txBody>
-        </p:sp>
-      </p:grpSp>
-    </p:spTree>
-    <p:extLst>
-      <p:ext uri="{BB962C8B-B14F-4D97-AF65-F5344CB8AC3E}">
-        <p14:creationId xmlns:p14="http://schemas.microsoft.com/office/powerpoint/2010/main" val="2009843063"/>
-      </p:ext>
-    </p:extLst>
   </p:cSld>
   <p:clrMapOvr>
     <a:masterClrMapping/>
@@ -17449,6 +17309,811 @@
 <file path=ppt/slides/slide20.xml><?xml version="1.0" encoding="utf-8"?>
 <p:sld xmlns:a="http://schemas.openxmlformats.org/drawingml/2006/main" xmlns:r="http://schemas.openxmlformats.org/officeDocument/2006/relationships" xmlns:p="http://schemas.openxmlformats.org/presentationml/2006/main">
   <p:cSld>
+    <p:bg>
+      <p:bgPr>
+        <a:solidFill>
+          <a:schemeClr val="tx2">
+            <a:lumMod val="20000"/>
+            <a:lumOff val="80000"/>
+          </a:schemeClr>
+        </a:solidFill>
+        <a:effectLst/>
+      </p:bgPr>
+    </p:bg>
+    <p:spTree>
+      <p:nvGrpSpPr>
+        <p:cNvPr id="1" name="">
+          <a:extLst>
+            <a:ext uri="{FF2B5EF4-FFF2-40B4-BE49-F238E27FC236}">
+              <a16:creationId xmlns:a16="http://schemas.microsoft.com/office/drawing/2014/main" id="{D04F8597-B8D5-F587-CF63-9BBA02E1FEE4}"/>
+            </a:ext>
+          </a:extLst>
+        </p:cNvPr>
+        <p:cNvGrpSpPr/>
+        <p:nvPr/>
+      </p:nvGrpSpPr>
+      <p:grpSpPr>
+        <a:xfrm>
+          <a:off x="0" y="0"/>
+          <a:ext cx="0" cy="0"/>
+          <a:chOff x="0" y="0"/>
+          <a:chExt cx="0" cy="0"/>
+        </a:xfrm>
+      </p:grpSpPr>
+      <p:grpSp>
+        <p:nvGrpSpPr>
+          <p:cNvPr id="9" name="Group 9">
+            <a:extLst>
+              <a:ext uri="{FF2B5EF4-FFF2-40B4-BE49-F238E27FC236}">
+                <a16:creationId xmlns:a16="http://schemas.microsoft.com/office/drawing/2014/main" id="{D67BD128-A5B3-8806-9C53-010092F73098}"/>
+              </a:ext>
+            </a:extLst>
+          </p:cNvPr>
+          <p:cNvGrpSpPr/>
+          <p:nvPr/>
+        </p:nvGrpSpPr>
+        <p:grpSpPr>
+          <a:xfrm>
+            <a:off x="7470309" y="3432372"/>
+            <a:ext cx="63671" cy="3422255"/>
+            <a:chOff x="0" y="0"/>
+            <a:chExt cx="16769" cy="901335"/>
+          </a:xfrm>
+        </p:grpSpPr>
+        <p:sp>
+          <p:nvSpPr>
+            <p:cNvPr id="10" name="Freeform 10">
+              <a:extLst>
+                <a:ext uri="{FF2B5EF4-FFF2-40B4-BE49-F238E27FC236}">
+                  <a16:creationId xmlns:a16="http://schemas.microsoft.com/office/drawing/2014/main" id="{37EBC445-B775-8E07-F6C9-4BDE96CDCAE9}"/>
+                </a:ext>
+              </a:extLst>
+            </p:cNvPr>
+            <p:cNvSpPr/>
+            <p:nvPr/>
+          </p:nvSpPr>
+          <p:spPr>
+            <a:xfrm>
+              <a:off x="0" y="0"/>
+              <a:ext cx="16769" cy="901335"/>
+            </a:xfrm>
+            <a:custGeom>
+              <a:avLst/>
+              <a:gdLst/>
+              <a:ahLst/>
+              <a:cxnLst/>
+              <a:rect l="l" t="t" r="r" b="b"/>
+              <a:pathLst>
+                <a:path w="16769" h="901335">
+                  <a:moveTo>
+                    <a:pt x="0" y="0"/>
+                  </a:moveTo>
+                  <a:lnTo>
+                    <a:pt x="16769" y="0"/>
+                  </a:lnTo>
+                  <a:lnTo>
+                    <a:pt x="16769" y="901335"/>
+                  </a:lnTo>
+                  <a:lnTo>
+                    <a:pt x="0" y="901335"/>
+                  </a:lnTo>
+                  <a:close/>
+                </a:path>
+              </a:pathLst>
+            </a:custGeom>
+            <a:solidFill>
+              <a:srgbClr val="FFFFFF"/>
+            </a:solidFill>
+          </p:spPr>
+          <p:txBody>
+            <a:bodyPr/>
+            <a:lstStyle/>
+            <a:p>
+              <a:endParaRPr lang="en-ID"/>
+            </a:p>
+          </p:txBody>
+        </p:sp>
+        <p:sp>
+          <p:nvSpPr>
+            <p:cNvPr id="11" name="TextBox 11">
+              <a:extLst>
+                <a:ext uri="{FF2B5EF4-FFF2-40B4-BE49-F238E27FC236}">
+                  <a16:creationId xmlns:a16="http://schemas.microsoft.com/office/drawing/2014/main" id="{C07C6DDB-7616-46F6-1151-26DF5F422FB8}"/>
+                </a:ext>
+              </a:extLst>
+            </p:cNvPr>
+            <p:cNvSpPr txBox="1"/>
+            <p:nvPr/>
+          </p:nvSpPr>
+          <p:spPr>
+            <a:xfrm>
+              <a:off x="0" y="-57150"/>
+              <a:ext cx="16769" cy="958485"/>
+            </a:xfrm>
+            <a:prstGeom prst="rect">
+              <a:avLst/>
+            </a:prstGeom>
+          </p:spPr>
+          <p:txBody>
+            <a:bodyPr lIns="50800" tIns="50800" rIns="50800" bIns="50800" rtlCol="0" anchor="ctr"/>
+            <a:lstStyle/>
+            <a:p>
+              <a:pPr algn="ctr">
+                <a:lnSpc>
+                  <a:spcPts val="2659"/>
+                </a:lnSpc>
+                <a:spcBef>
+                  <a:spcPct val="0"/>
+                </a:spcBef>
+              </a:pPr>
+              <a:endParaRPr/>
+            </a:p>
+          </p:txBody>
+        </p:sp>
+      </p:grpSp>
+      <p:sp>
+        <p:nvSpPr>
+          <p:cNvPr id="12" name="Freeform 12">
+            <a:extLst>
+              <a:ext uri="{FF2B5EF4-FFF2-40B4-BE49-F238E27FC236}">
+                <a16:creationId xmlns:a16="http://schemas.microsoft.com/office/drawing/2014/main" id="{9DA113F2-8BF7-971B-217D-86FAE75195CF}"/>
+              </a:ext>
+            </a:extLst>
+          </p:cNvPr>
+          <p:cNvSpPr/>
+          <p:nvPr/>
+        </p:nvSpPr>
+        <p:spPr>
+          <a:xfrm>
+            <a:off x="-299501" y="8580145"/>
+            <a:ext cx="3711297" cy="1356310"/>
+          </a:xfrm>
+          <a:custGeom>
+            <a:avLst/>
+            <a:gdLst/>
+            <a:ahLst/>
+            <a:cxnLst/>
+            <a:rect l="l" t="t" r="r" b="b"/>
+            <a:pathLst>
+              <a:path w="3711297" h="1356310">
+                <a:moveTo>
+                  <a:pt x="0" y="0"/>
+                </a:moveTo>
+                <a:lnTo>
+                  <a:pt x="3711297" y="0"/>
+                </a:lnTo>
+                <a:lnTo>
+                  <a:pt x="3711297" y="1356310"/>
+                </a:lnTo>
+                <a:lnTo>
+                  <a:pt x="0" y="1356310"/>
+                </a:lnTo>
+                <a:lnTo>
+                  <a:pt x="0" y="0"/>
+                </a:lnTo>
+                <a:close/>
+              </a:path>
+            </a:pathLst>
+          </a:custGeom>
+          <a:blipFill>
+            <a:blip r:embed="rId2">
+              <a:extLst>
+                <a:ext uri="{96DAC541-7B7A-43D3-8B79-37D633B846F1}">
+                  <asvg:svgBlip xmlns:asvg="http://schemas.microsoft.com/office/drawing/2016/SVG/main" r:embed="rId3"/>
+                </a:ext>
+              </a:extLst>
+            </a:blip>
+            <a:stretch>
+              <a:fillRect/>
+            </a:stretch>
+          </a:blipFill>
+        </p:spPr>
+        <p:txBody>
+          <a:bodyPr/>
+          <a:lstStyle/>
+          <a:p>
+            <a:endParaRPr lang="en-ID"/>
+          </a:p>
+        </p:txBody>
+      </p:sp>
+      <p:sp>
+        <p:nvSpPr>
+          <p:cNvPr id="13" name="Freeform 13">
+            <a:extLst>
+              <a:ext uri="{FF2B5EF4-FFF2-40B4-BE49-F238E27FC236}">
+                <a16:creationId xmlns:a16="http://schemas.microsoft.com/office/drawing/2014/main" id="{1DB0EB03-5DE5-E4D1-16DD-CCBEA7900F35}"/>
+              </a:ext>
+            </a:extLst>
+          </p:cNvPr>
+          <p:cNvSpPr/>
+          <p:nvPr/>
+        </p:nvSpPr>
+        <p:spPr>
+          <a:xfrm>
+            <a:off x="14874375" y="350545"/>
+            <a:ext cx="3711297" cy="1356310"/>
+          </a:xfrm>
+          <a:custGeom>
+            <a:avLst/>
+            <a:gdLst/>
+            <a:ahLst/>
+            <a:cxnLst/>
+            <a:rect l="l" t="t" r="r" b="b"/>
+            <a:pathLst>
+              <a:path w="3711297" h="1356310">
+                <a:moveTo>
+                  <a:pt x="0" y="0"/>
+                </a:moveTo>
+                <a:lnTo>
+                  <a:pt x="3711297" y="0"/>
+                </a:lnTo>
+                <a:lnTo>
+                  <a:pt x="3711297" y="1356310"/>
+                </a:lnTo>
+                <a:lnTo>
+                  <a:pt x="0" y="1356310"/>
+                </a:lnTo>
+                <a:lnTo>
+                  <a:pt x="0" y="0"/>
+                </a:lnTo>
+                <a:close/>
+              </a:path>
+            </a:pathLst>
+          </a:custGeom>
+          <a:blipFill>
+            <a:blip r:embed="rId2">
+              <a:extLst>
+                <a:ext uri="{96DAC541-7B7A-43D3-8B79-37D633B846F1}">
+                  <asvg:svgBlip xmlns:asvg="http://schemas.microsoft.com/office/drawing/2016/SVG/main" r:embed="rId3"/>
+                </a:ext>
+              </a:extLst>
+            </a:blip>
+            <a:stretch>
+              <a:fillRect/>
+            </a:stretch>
+          </a:blipFill>
+        </p:spPr>
+        <p:txBody>
+          <a:bodyPr/>
+          <a:lstStyle/>
+          <a:p>
+            <a:endParaRPr lang="en-ID"/>
+          </a:p>
+        </p:txBody>
+      </p:sp>
+      <p:sp>
+        <p:nvSpPr>
+          <p:cNvPr id="14" name="Freeform 14">
+            <a:extLst>
+              <a:ext uri="{FF2B5EF4-FFF2-40B4-BE49-F238E27FC236}">
+                <a16:creationId xmlns:a16="http://schemas.microsoft.com/office/drawing/2014/main" id="{D98D5AED-F503-A4B7-A23E-3B950B07A373}"/>
+              </a:ext>
+            </a:extLst>
+          </p:cNvPr>
+          <p:cNvSpPr/>
+          <p:nvPr/>
+        </p:nvSpPr>
+        <p:spPr>
+          <a:xfrm>
+            <a:off x="1578616" y="6526482"/>
+            <a:ext cx="3666360" cy="2486459"/>
+          </a:xfrm>
+          <a:custGeom>
+            <a:avLst/>
+            <a:gdLst/>
+            <a:ahLst/>
+            <a:cxnLst/>
+            <a:rect l="l" t="t" r="r" b="b"/>
+            <a:pathLst>
+              <a:path w="3666360" h="2486459">
+                <a:moveTo>
+                  <a:pt x="0" y="0"/>
+                </a:moveTo>
+                <a:lnTo>
+                  <a:pt x="3666360" y="0"/>
+                </a:lnTo>
+                <a:lnTo>
+                  <a:pt x="3666360" y="2486458"/>
+                </a:lnTo>
+                <a:lnTo>
+                  <a:pt x="0" y="2486458"/>
+                </a:lnTo>
+                <a:lnTo>
+                  <a:pt x="0" y="0"/>
+                </a:lnTo>
+                <a:close/>
+              </a:path>
+            </a:pathLst>
+          </a:custGeom>
+          <a:blipFill>
+            <a:blip r:embed="rId4">
+              <a:duotone>
+                <a:prstClr val="black"/>
+                <a:schemeClr val="accent1">
+                  <a:tint val="45000"/>
+                  <a:satMod val="400000"/>
+                </a:schemeClr>
+              </a:duotone>
+              <a:extLst>
+                <a:ext uri="{96DAC541-7B7A-43D3-8B79-37D633B846F1}">
+                  <asvg:svgBlip xmlns:asvg="http://schemas.microsoft.com/office/drawing/2016/SVG/main" r:embed="rId5"/>
+                </a:ext>
+              </a:extLst>
+            </a:blip>
+            <a:stretch>
+              <a:fillRect/>
+            </a:stretch>
+          </a:blipFill>
+        </p:spPr>
+        <p:txBody>
+          <a:bodyPr/>
+          <a:lstStyle/>
+          <a:p>
+            <a:endParaRPr lang="en-ID"/>
+          </a:p>
+        </p:txBody>
+      </p:sp>
+      <p:sp>
+        <p:nvSpPr>
+          <p:cNvPr id="15" name="TextBox 15">
+            <a:extLst>
+              <a:ext uri="{FF2B5EF4-FFF2-40B4-BE49-F238E27FC236}">
+                <a16:creationId xmlns:a16="http://schemas.microsoft.com/office/drawing/2014/main" id="{3979171B-F05E-429F-EF52-BEDB38A738A5}"/>
+              </a:ext>
+            </a:extLst>
+          </p:cNvPr>
+          <p:cNvSpPr txBox="1"/>
+          <p:nvPr/>
+        </p:nvSpPr>
+        <p:spPr>
+          <a:xfrm>
+            <a:off x="1828447" y="4699635"/>
+            <a:ext cx="5485491" cy="2592697"/>
+          </a:xfrm>
+          <a:prstGeom prst="rect">
+            <a:avLst/>
+          </a:prstGeom>
+        </p:spPr>
+        <p:txBody>
+          <a:bodyPr lIns="0" tIns="0" rIns="0" bIns="0" rtlCol="0" anchor="t">
+            <a:spAutoFit/>
+          </a:bodyPr>
+          <a:lstStyle/>
+          <a:p>
+            <a:pPr algn="ctr">
+              <a:lnSpc>
+                <a:spcPts val="6660"/>
+              </a:lnSpc>
+            </a:pPr>
+            <a:r>
+              <a:rPr lang="en-US" sz="6000" b="1" dirty="0">
+                <a:latin typeface="Coco Gothic Heavy"/>
+                <a:ea typeface="Coco Gothic Heavy"/>
+                <a:cs typeface="Coco Gothic Heavy"/>
+                <a:sym typeface="Coco Gothic Heavy"/>
+              </a:rPr>
+              <a:t>Why you should hire me</a:t>
+            </a:r>
+          </a:p>
+        </p:txBody>
+      </p:sp>
+      <p:sp>
+        <p:nvSpPr>
+          <p:cNvPr id="16" name="TextBox 16">
+            <a:extLst>
+              <a:ext uri="{FF2B5EF4-FFF2-40B4-BE49-F238E27FC236}">
+                <a16:creationId xmlns:a16="http://schemas.microsoft.com/office/drawing/2014/main" id="{03A70665-10D9-FE2D-734E-6703381E5366}"/>
+              </a:ext>
+            </a:extLst>
+          </p:cNvPr>
+          <p:cNvSpPr txBox="1"/>
+          <p:nvPr/>
+        </p:nvSpPr>
+        <p:spPr>
+          <a:xfrm>
+            <a:off x="8164249" y="3516313"/>
+            <a:ext cx="7894928" cy="3572773"/>
+          </a:xfrm>
+          <a:prstGeom prst="rect">
+            <a:avLst/>
+          </a:prstGeom>
+        </p:spPr>
+        <p:txBody>
+          <a:bodyPr lIns="0" tIns="0" rIns="0" bIns="0" rtlCol="0" anchor="t">
+            <a:spAutoFit/>
+          </a:bodyPr>
+          <a:lstStyle/>
+          <a:p>
+            <a:pPr algn="just">
+              <a:lnSpc>
+                <a:spcPts val="2800"/>
+              </a:lnSpc>
+            </a:pPr>
+            <a:r>
+              <a:rPr lang="en-US" sz="2000" dirty="0">
+                <a:latin typeface="Poppins"/>
+                <a:ea typeface="Poppins"/>
+                <a:cs typeface="Poppins"/>
+                <a:sym typeface="Poppins"/>
+              </a:rPr>
+              <a:t>There are a lot of Fullstack engineers in Indonesia and maybe a lot of them are in a better skills, but I guarantee that I am the one with the fastest skill development among all of them. The reason is, beside of the fact that I am smart and so enthusiastic with Software Engineering, I also have a long history of preparing my self to be an IT Entrepreneur. That builds the now-me who are fast-learner and highly-dedicated. You can give me the opportunity to be Cofounding Fullstack Engineer Intern for your company, I will show how eligible I am for Cofounding Fullstack Engineer position.</a:t>
+            </a:r>
+          </a:p>
+        </p:txBody>
+      </p:sp>
+      <p:sp>
+        <p:nvSpPr>
+          <p:cNvPr id="17" name="Freeform 17">
+            <a:extLst>
+              <a:ext uri="{FF2B5EF4-FFF2-40B4-BE49-F238E27FC236}">
+                <a16:creationId xmlns:a16="http://schemas.microsoft.com/office/drawing/2014/main" id="{A9CE591B-0A59-7290-F9DE-7547A745F4C8}"/>
+              </a:ext>
+            </a:extLst>
+          </p:cNvPr>
+          <p:cNvSpPr/>
+          <p:nvPr/>
+        </p:nvSpPr>
+        <p:spPr>
+          <a:xfrm rot="-10800000">
+            <a:off x="13665094" y="1209693"/>
+            <a:ext cx="2418563" cy="1640225"/>
+          </a:xfrm>
+          <a:custGeom>
+            <a:avLst/>
+            <a:gdLst/>
+            <a:ahLst/>
+            <a:cxnLst/>
+            <a:rect l="l" t="t" r="r" b="b"/>
+            <a:pathLst>
+              <a:path w="2418563" h="1640225">
+                <a:moveTo>
+                  <a:pt x="0" y="0"/>
+                </a:moveTo>
+                <a:lnTo>
+                  <a:pt x="2418563" y="0"/>
+                </a:lnTo>
+                <a:lnTo>
+                  <a:pt x="2418563" y="1640225"/>
+                </a:lnTo>
+                <a:lnTo>
+                  <a:pt x="0" y="1640225"/>
+                </a:lnTo>
+                <a:lnTo>
+                  <a:pt x="0" y="0"/>
+                </a:lnTo>
+                <a:close/>
+              </a:path>
+            </a:pathLst>
+          </a:custGeom>
+          <a:blipFill>
+            <a:blip r:embed="rId4">
+              <a:duotone>
+                <a:schemeClr val="accent1">
+                  <a:shade val="45000"/>
+                  <a:satMod val="135000"/>
+                </a:schemeClr>
+                <a:prstClr val="white"/>
+              </a:duotone>
+              <a:extLst>
+                <a:ext uri="{96DAC541-7B7A-43D3-8B79-37D633B846F1}">
+                  <asvg:svgBlip xmlns:asvg="http://schemas.microsoft.com/office/drawing/2016/SVG/main" r:embed="rId5"/>
+                </a:ext>
+              </a:extLst>
+            </a:blip>
+            <a:stretch>
+              <a:fillRect/>
+            </a:stretch>
+          </a:blipFill>
+        </p:spPr>
+        <p:txBody>
+          <a:bodyPr/>
+          <a:lstStyle/>
+          <a:p>
+            <a:endParaRPr lang="en-ID" dirty="0"/>
+          </a:p>
+        </p:txBody>
+      </p:sp>
+      <p:sp>
+        <p:nvSpPr>
+          <p:cNvPr id="18" name="TextBox 3">
+            <a:extLst>
+              <a:ext uri="{FF2B5EF4-FFF2-40B4-BE49-F238E27FC236}">
+                <a16:creationId xmlns:a16="http://schemas.microsoft.com/office/drawing/2014/main" id="{BBF7C67D-F9A3-D258-4B94-935E91A01C71}"/>
+              </a:ext>
+            </a:extLst>
+          </p:cNvPr>
+          <p:cNvSpPr txBox="1"/>
+          <p:nvPr/>
+        </p:nvSpPr>
+        <p:spPr>
+          <a:xfrm>
+            <a:off x="1395892" y="691659"/>
+            <a:ext cx="1565938" cy="260841"/>
+          </a:xfrm>
+          <a:prstGeom prst="rect">
+            <a:avLst/>
+          </a:prstGeom>
+        </p:spPr>
+        <p:txBody>
+          <a:bodyPr lIns="0" tIns="0" rIns="0" bIns="0" rtlCol="0" anchor="t">
+            <a:spAutoFit/>
+          </a:bodyPr>
+          <a:lstStyle/>
+          <a:p>
+            <a:pPr>
+              <a:lnSpc>
+                <a:spcPts val="1652"/>
+              </a:lnSpc>
+            </a:pPr>
+            <a:r>
+              <a:rPr lang="en-US" sz="2800" b="1" dirty="0">
+                <a:solidFill>
+                  <a:srgbClr val="343434"/>
+                </a:solidFill>
+                <a:latin typeface="Coco Gothic"/>
+                <a:ea typeface="Coco Gothic"/>
+                <a:cs typeface="Coco Gothic"/>
+                <a:sym typeface="Coco Gothic"/>
+              </a:rPr>
+              <a:t>Yinni</a:t>
+            </a:r>
+          </a:p>
+        </p:txBody>
+      </p:sp>
+      <p:sp>
+        <p:nvSpPr>
+          <p:cNvPr id="19" name="TextBox 4">
+            <a:extLst>
+              <a:ext uri="{FF2B5EF4-FFF2-40B4-BE49-F238E27FC236}">
+                <a16:creationId xmlns:a16="http://schemas.microsoft.com/office/drawing/2014/main" id="{CEB59037-E571-4614-C14D-F62CCDBE13F7}"/>
+              </a:ext>
+            </a:extLst>
+          </p:cNvPr>
+          <p:cNvSpPr txBox="1"/>
+          <p:nvPr/>
+        </p:nvSpPr>
+        <p:spPr>
+          <a:xfrm>
+            <a:off x="1394542" y="880543"/>
+            <a:ext cx="3329858" cy="224357"/>
+          </a:xfrm>
+          <a:prstGeom prst="rect">
+            <a:avLst/>
+          </a:prstGeom>
+        </p:spPr>
+        <p:txBody>
+          <a:bodyPr wrap="square" lIns="0" tIns="0" rIns="0" bIns="0" rtlCol="0" anchor="t">
+            <a:spAutoFit/>
+          </a:bodyPr>
+          <a:lstStyle/>
+          <a:p>
+            <a:pPr>
+              <a:lnSpc>
+                <a:spcPts val="1654"/>
+              </a:lnSpc>
+            </a:pPr>
+            <a:r>
+              <a:rPr lang="en-US" sz="1654" b="1" spc="198" dirty="0">
+                <a:solidFill>
+                  <a:srgbClr val="343434"/>
+                </a:solidFill>
+                <a:latin typeface="Coco Gothic Bold"/>
+                <a:ea typeface="Coco Gothic Bold"/>
+                <a:cs typeface="Coco Gothic Bold"/>
+                <a:sym typeface="Coco Gothic Bold"/>
+              </a:rPr>
+              <a:t>AI-Assisted Shopping</a:t>
+            </a:r>
+          </a:p>
+        </p:txBody>
+      </p:sp>
+      <p:pic>
+        <p:nvPicPr>
+          <p:cNvPr id="20" name="Picture 19">
+            <a:extLst>
+              <a:ext uri="{FF2B5EF4-FFF2-40B4-BE49-F238E27FC236}">
+                <a16:creationId xmlns:a16="http://schemas.microsoft.com/office/drawing/2014/main" id="{3A7ABEBC-7A51-1472-63F8-6D37C9DCF740}"/>
+              </a:ext>
+            </a:extLst>
+          </p:cNvPr>
+          <p:cNvPicPr>
+            <a:picLocks noChangeAspect="1"/>
+          </p:cNvPicPr>
+          <p:nvPr/>
+        </p:nvPicPr>
+        <p:blipFill>
+          <a:blip r:embed="rId6" cstate="print">
+            <a:extLst>
+              <a:ext uri="{28A0092B-C50C-407E-A947-70E740481C1C}">
+                <a14:useLocalDpi xmlns:a14="http://schemas.microsoft.com/office/drawing/2010/main" val="0"/>
+              </a:ext>
+            </a:extLst>
+          </a:blip>
+          <a:stretch>
+            <a:fillRect/>
+          </a:stretch>
+        </p:blipFill>
+        <p:spPr>
+          <a:xfrm>
+            <a:off x="644350" y="397507"/>
+            <a:ext cx="859793" cy="859793"/>
+          </a:xfrm>
+          <a:prstGeom prst="rect">
+            <a:avLst/>
+          </a:prstGeom>
+        </p:spPr>
+      </p:pic>
+      <p:grpSp>
+        <p:nvGrpSpPr>
+          <p:cNvPr id="25" name="Group 17">
+            <a:extLst>
+              <a:ext uri="{FF2B5EF4-FFF2-40B4-BE49-F238E27FC236}">
+                <a16:creationId xmlns:a16="http://schemas.microsoft.com/office/drawing/2014/main" id="{16E5BFF1-322D-4FBF-F2B9-DB6354E09CC9}"/>
+              </a:ext>
+            </a:extLst>
+          </p:cNvPr>
+          <p:cNvGrpSpPr/>
+          <p:nvPr/>
+        </p:nvGrpSpPr>
+        <p:grpSpPr>
+          <a:xfrm>
+            <a:off x="13335000" y="9253126"/>
+            <a:ext cx="3918346" cy="670011"/>
+            <a:chOff x="0" y="-66675"/>
+            <a:chExt cx="4327267" cy="893347"/>
+          </a:xfrm>
+        </p:grpSpPr>
+        <p:sp>
+          <p:nvSpPr>
+            <p:cNvPr id="26" name="TextBox 18">
+              <a:extLst>
+                <a:ext uri="{FF2B5EF4-FFF2-40B4-BE49-F238E27FC236}">
+                  <a16:creationId xmlns:a16="http://schemas.microsoft.com/office/drawing/2014/main" id="{8090FE41-F24A-9FF9-6678-0181299A1A43}"/>
+                </a:ext>
+              </a:extLst>
+            </p:cNvPr>
+            <p:cNvSpPr txBox="1"/>
+            <p:nvPr/>
+          </p:nvSpPr>
+          <p:spPr>
+            <a:xfrm>
+              <a:off x="0" y="20383"/>
+              <a:ext cx="3493131" cy="806289"/>
+            </a:xfrm>
+            <a:prstGeom prst="rect">
+              <a:avLst/>
+            </a:prstGeom>
+          </p:spPr>
+          <p:txBody>
+            <a:bodyPr lIns="0" tIns="0" rIns="0" bIns="0" rtlCol="0" anchor="t">
+              <a:spAutoFit/>
+            </a:bodyPr>
+            <a:lstStyle/>
+            <a:p>
+              <a:pPr algn="l">
+                <a:lnSpc>
+                  <a:spcPts val="2416"/>
+                </a:lnSpc>
+              </a:pPr>
+              <a:r>
+                <a:rPr lang="en-US" sz="1726" b="1" dirty="0">
+                  <a:solidFill>
+                    <a:srgbClr val="343434"/>
+                  </a:solidFill>
+                  <a:latin typeface="Coco Gothic Heavy"/>
+                  <a:ea typeface="Coco Gothic Heavy"/>
+                  <a:cs typeface="Coco Gothic Heavy"/>
+                  <a:sym typeface="Coco Gothic Heavy"/>
+                </a:rPr>
+                <a:t>APPLICATION PROPOSAL</a:t>
+              </a:r>
+            </a:p>
+          </p:txBody>
+        </p:sp>
+        <p:sp>
+          <p:nvSpPr>
+            <p:cNvPr id="27" name="TextBox 19">
+              <a:extLst>
+                <a:ext uri="{FF2B5EF4-FFF2-40B4-BE49-F238E27FC236}">
+                  <a16:creationId xmlns:a16="http://schemas.microsoft.com/office/drawing/2014/main" id="{8438B72C-EE94-CBBB-3BA6-CEE68AD0E037}"/>
+                </a:ext>
+              </a:extLst>
+            </p:cNvPr>
+            <p:cNvSpPr txBox="1"/>
+            <p:nvPr/>
+          </p:nvSpPr>
+          <p:spPr>
+            <a:xfrm>
+              <a:off x="3530953" y="-66675"/>
+              <a:ext cx="796314" cy="571288"/>
+            </a:xfrm>
+            <a:prstGeom prst="rect">
+              <a:avLst/>
+            </a:prstGeom>
+          </p:spPr>
+          <p:txBody>
+            <a:bodyPr lIns="0" tIns="0" rIns="0" bIns="0" rtlCol="0" anchor="t">
+              <a:spAutoFit/>
+            </a:bodyPr>
+            <a:lstStyle/>
+            <a:p>
+              <a:pPr algn="ctr">
+                <a:lnSpc>
+                  <a:spcPts val="3499"/>
+                </a:lnSpc>
+              </a:pPr>
+              <a:r>
+                <a:rPr lang="en-US" sz="2499" b="1" dirty="0">
+                  <a:solidFill>
+                    <a:srgbClr val="343434"/>
+                  </a:solidFill>
+                  <a:latin typeface="Coco Gothic Heavy"/>
+                  <a:ea typeface="Coco Gothic Heavy"/>
+                  <a:cs typeface="Coco Gothic Heavy"/>
+                  <a:sym typeface="Coco Gothic Heavy"/>
+                </a:rPr>
+                <a:t>20</a:t>
+              </a:r>
+            </a:p>
+          </p:txBody>
+        </p:sp>
+        <p:sp>
+          <p:nvSpPr>
+            <p:cNvPr id="28" name="AutoShape 20">
+              <a:extLst>
+                <a:ext uri="{FF2B5EF4-FFF2-40B4-BE49-F238E27FC236}">
+                  <a16:creationId xmlns:a16="http://schemas.microsoft.com/office/drawing/2014/main" id="{831CCD2C-C106-55F1-A52F-CADDEA4DA5D8}"/>
+                </a:ext>
+              </a:extLst>
+            </p:cNvPr>
+            <p:cNvSpPr/>
+            <p:nvPr/>
+          </p:nvSpPr>
+          <p:spPr>
+            <a:xfrm>
+              <a:off x="3493131" y="20147"/>
+              <a:ext cx="0" cy="405967"/>
+            </a:xfrm>
+            <a:prstGeom prst="line">
+              <a:avLst/>
+            </a:prstGeom>
+            <a:ln w="50800" cap="flat">
+              <a:solidFill>
+                <a:schemeClr val="tx2">
+                  <a:lumMod val="40000"/>
+                  <a:lumOff val="60000"/>
+                </a:schemeClr>
+              </a:solidFill>
+              <a:prstDash val="solid"/>
+              <a:headEnd type="none" w="sm" len="sm"/>
+              <a:tailEnd type="none" w="sm" len="sm"/>
+            </a:ln>
+          </p:spPr>
+          <p:txBody>
+            <a:bodyPr/>
+            <a:lstStyle/>
+            <a:p>
+              <a:endParaRPr lang="en-ID"/>
+            </a:p>
+          </p:txBody>
+        </p:sp>
+      </p:grpSp>
+    </p:spTree>
+    <p:extLst>
+      <p:ext uri="{BB962C8B-B14F-4D97-AF65-F5344CB8AC3E}">
+        <p14:creationId xmlns:p14="http://schemas.microsoft.com/office/powerpoint/2010/main" val="2009843063"/>
+      </p:ext>
+    </p:extLst>
+  </p:cSld>
+  <p:clrMapOvr>
+    <a:masterClrMapping/>
+  </p:clrMapOvr>
+</p:sld>
+</file>
+
+<file path=ppt/slides/slide21.xml><?xml version="1.0" encoding="utf-8"?>
+<p:sld xmlns:a="http://schemas.openxmlformats.org/drawingml/2006/main" xmlns:r="http://schemas.openxmlformats.org/officeDocument/2006/relationships" xmlns:p="http://schemas.openxmlformats.org/presentationml/2006/main">
+  <p:cSld>
     <p:spTree>
       <p:nvGrpSpPr>
         <p:cNvPr id="1" name=""/>
@@ -17828,7 +18493,7 @@
             <a:off x="13335000" y="9253126"/>
             <a:ext cx="3918346" cy="670011"/>
             <a:chOff x="0" y="-66675"/>
-            <a:chExt cx="4327267" cy="893347"/>
+            <a:chExt cx="4327268" cy="893347"/>
           </a:xfrm>
         </p:grpSpPr>
         <p:sp>
@@ -17892,8 +18557,8 @@
           </p:nvSpPr>
           <p:spPr>
             <a:xfrm>
-              <a:off x="3530953" y="-66675"/>
-              <a:ext cx="796314" cy="571288"/>
+              <a:off x="3530954" y="-66675"/>
+              <a:ext cx="796314" cy="571287"/>
             </a:xfrm>
             <a:prstGeom prst="rect">
               <a:avLst/>
@@ -17920,7 +18585,7 @@
                   <a:cs typeface="Coco Gothic Heavy"/>
                   <a:sym typeface="Coco Gothic Heavy"/>
                 </a:rPr>
-                <a:t>20</a:t>
+                <a:t>21</a:t>
               </a:r>
             </a:p>
           </p:txBody>
@@ -18779,7 +19444,7 @@
 </p:sld>
 </file>
 
-<file path=ppt/slides/slide21.xml><?xml version="1.0" encoding="utf-8"?>
+<file path=ppt/slides/slide22.xml><?xml version="1.0" encoding="utf-8"?>
 <p:sld xmlns:a="http://schemas.openxmlformats.org/drawingml/2006/main" xmlns:r="http://schemas.openxmlformats.org/officeDocument/2006/relationships" xmlns:p="http://schemas.openxmlformats.org/presentationml/2006/main">
   <p:cSld>
     <p:bg>

--- a/yinni_app_proposal.pptx
+++ b/yinni_app_proposal.pptx
@@ -5,7 +5,7 @@
     <p:sldMasterId id="2147483648" r:id="rId1"/>
   </p:sldMasterIdLst>
   <p:notesMasterIdLst>
-    <p:notesMasterId r:id="rId24"/>
+    <p:notesMasterId r:id="rId25"/>
   </p:notesMasterIdLst>
   <p:sldIdLst>
     <p:sldId id="256" r:id="rId2"/>
@@ -26,36 +26,37 @@
     <p:sldId id="285" r:id="rId17"/>
     <p:sldId id="286" r:id="rId18"/>
     <p:sldId id="288" r:id="rId19"/>
-    <p:sldId id="267" r:id="rId20"/>
-    <p:sldId id="287" r:id="rId21"/>
-    <p:sldId id="269" r:id="rId22"/>
-    <p:sldId id="270" r:id="rId23"/>
+    <p:sldId id="289" r:id="rId20"/>
+    <p:sldId id="267" r:id="rId21"/>
+    <p:sldId id="287" r:id="rId22"/>
+    <p:sldId id="269" r:id="rId23"/>
+    <p:sldId id="270" r:id="rId24"/>
   </p:sldIdLst>
   <p:sldSz cx="18288000" cy="10287000"/>
   <p:notesSz cx="6858000" cy="9144000"/>
   <p:embeddedFontLst>
     <p:embeddedFont>
       <p:font typeface="Coco Gothic" panose="020B0604020202020204" charset="0"/>
-      <p:regular r:id="rId25"/>
+      <p:regular r:id="rId26"/>
     </p:embeddedFont>
     <p:embeddedFont>
       <p:font typeface="Coco Gothic Bold" panose="020B0604020202020204" charset="0"/>
-      <p:regular r:id="rId26"/>
+      <p:regular r:id="rId27"/>
     </p:embeddedFont>
     <p:embeddedFont>
       <p:font typeface="Coco Gothic Heavy" panose="020B0604020202020204" charset="0"/>
-      <p:regular r:id="rId27"/>
+      <p:regular r:id="rId28"/>
     </p:embeddedFont>
     <p:embeddedFont>
       <p:font typeface="Poppins" panose="00000500000000000000" pitchFamily="2" charset="0"/>
-      <p:regular r:id="rId28"/>
-      <p:bold r:id="rId29"/>
-      <p:italic r:id="rId30"/>
-      <p:boldItalic r:id="rId31"/>
+      <p:regular r:id="rId29"/>
+      <p:bold r:id="rId30"/>
+      <p:italic r:id="rId31"/>
+      <p:boldItalic r:id="rId32"/>
     </p:embeddedFont>
     <p:embeddedFont>
       <p:font typeface="Poppins Bold" panose="00000800000000000000" charset="0"/>
-      <p:regular r:id="rId32"/>
+      <p:regular r:id="rId33"/>
     </p:embeddedFont>
   </p:embeddedFontLst>
   <p:defaultTextStyle>
@@ -872,7 +873,7 @@
           <a:p>
             <a:fld id="{F072D4F5-A1EA-4AEF-97E6-A14332C9314F}" type="datetimeFigureOut">
               <a:rPr lang="en-ID" smtClean="0"/>
-              <a:t>21/01/2026</a:t>
+              <a:t>22/01/2026</a:t>
             </a:fld>
             <a:endParaRPr lang="en-ID"/>
           </a:p>
@@ -1320,7 +1321,7 @@
             <a:fld id="{1D8BD707-D9CF-40AE-B4C6-C98DA3205C09}" type="datetimeFigureOut">
               <a:rPr lang="en-US" smtClean="0"/>
               <a:pPr/>
-              <a:t>1/21/2026</a:t>
+              <a:t>1/22/2026</a:t>
             </a:fld>
             <a:endParaRPr lang="en-US"/>
           </a:p>
@@ -1485,7 +1486,7 @@
             <a:fld id="{1D8BD707-D9CF-40AE-B4C6-C98DA3205C09}" type="datetimeFigureOut">
               <a:rPr lang="en-US" smtClean="0"/>
               <a:pPr/>
-              <a:t>1/21/2026</a:t>
+              <a:t>1/22/2026</a:t>
             </a:fld>
             <a:endParaRPr lang="en-US"/>
           </a:p>
@@ -1660,7 +1661,7 @@
             <a:fld id="{1D8BD707-D9CF-40AE-B4C6-C98DA3205C09}" type="datetimeFigureOut">
               <a:rPr lang="en-US" smtClean="0"/>
               <a:pPr/>
-              <a:t>1/21/2026</a:t>
+              <a:t>1/22/2026</a:t>
             </a:fld>
             <a:endParaRPr lang="en-US"/>
           </a:p>
@@ -1825,7 +1826,7 @@
             <a:fld id="{1D8BD707-D9CF-40AE-B4C6-C98DA3205C09}" type="datetimeFigureOut">
               <a:rPr lang="en-US" smtClean="0"/>
               <a:pPr/>
-              <a:t>1/21/2026</a:t>
+              <a:t>1/22/2026</a:t>
             </a:fld>
             <a:endParaRPr lang="en-US"/>
           </a:p>
@@ -2067,7 +2068,7 @@
             <a:fld id="{1D8BD707-D9CF-40AE-B4C6-C98DA3205C09}" type="datetimeFigureOut">
               <a:rPr lang="en-US" smtClean="0"/>
               <a:pPr/>
-              <a:t>1/21/2026</a:t>
+              <a:t>1/22/2026</a:t>
             </a:fld>
             <a:endParaRPr lang="en-US"/>
           </a:p>
@@ -2349,7 +2350,7 @@
             <a:fld id="{1D8BD707-D9CF-40AE-B4C6-C98DA3205C09}" type="datetimeFigureOut">
               <a:rPr lang="en-US" smtClean="0"/>
               <a:pPr/>
-              <a:t>1/21/2026</a:t>
+              <a:t>1/22/2026</a:t>
             </a:fld>
             <a:endParaRPr lang="en-US"/>
           </a:p>
@@ -2765,7 +2766,7 @@
             <a:fld id="{1D8BD707-D9CF-40AE-B4C6-C98DA3205C09}" type="datetimeFigureOut">
               <a:rPr lang="en-US" smtClean="0"/>
               <a:pPr/>
-              <a:t>1/21/2026</a:t>
+              <a:t>1/22/2026</a:t>
             </a:fld>
             <a:endParaRPr lang="en-US"/>
           </a:p>
@@ -2879,7 +2880,7 @@
             <a:fld id="{1D8BD707-D9CF-40AE-B4C6-C98DA3205C09}" type="datetimeFigureOut">
               <a:rPr lang="en-US" smtClean="0"/>
               <a:pPr/>
-              <a:t>1/21/2026</a:t>
+              <a:t>1/22/2026</a:t>
             </a:fld>
             <a:endParaRPr lang="en-US"/>
           </a:p>
@@ -2971,7 +2972,7 @@
             <a:fld id="{1D8BD707-D9CF-40AE-B4C6-C98DA3205C09}" type="datetimeFigureOut">
               <a:rPr lang="en-US" smtClean="0"/>
               <a:pPr/>
-              <a:t>1/21/2026</a:t>
+              <a:t>1/22/2026</a:t>
             </a:fld>
             <a:endParaRPr lang="en-US"/>
           </a:p>
@@ -3243,7 +3244,7 @@
             <a:fld id="{1D8BD707-D9CF-40AE-B4C6-C98DA3205C09}" type="datetimeFigureOut">
               <a:rPr lang="en-US" smtClean="0"/>
               <a:pPr/>
-              <a:t>1/21/2026</a:t>
+              <a:t>1/22/2026</a:t>
             </a:fld>
             <a:endParaRPr lang="en-US"/>
           </a:p>
@@ -3492,7 +3493,7 @@
             <a:fld id="{1D8BD707-D9CF-40AE-B4C6-C98DA3205C09}" type="datetimeFigureOut">
               <a:rPr lang="en-US" smtClean="0"/>
               <a:pPr/>
-              <a:t>1/21/2026</a:t>
+              <a:t>1/22/2026</a:t>
             </a:fld>
             <a:endParaRPr lang="en-US"/>
           </a:p>
@@ -3700,7 +3701,7 @@
             <a:fld id="{1D8BD707-D9CF-40AE-B4C6-C98DA3205C09}" type="datetimeFigureOut">
               <a:rPr lang="en-US" smtClean="0"/>
               <a:pPr/>
-              <a:t>1/21/2026</a:t>
+              <a:t>1/22/2026</a:t>
             </a:fld>
             <a:endParaRPr lang="en-US"/>
           </a:p>
@@ -10461,7 +10462,31 @@
                 <a:cs typeface="Poppins"/>
                 <a:sym typeface="Poppins"/>
               </a:rPr>
-              <a:t>Yinni App Product Service utilizes standard embedding-based similarity search via the OpenAI text-embedding-3-small model.</a:t>
+              <a:t>Yinni App Product Service utilizes standard embedding-based similarity search via the </a:t>
+            </a:r>
+            <a:r>
+              <a:rPr lang="en-US" sz="2000" b="1" dirty="0">
+                <a:solidFill>
+                  <a:srgbClr val="343434"/>
+                </a:solidFill>
+                <a:latin typeface="Poppins"/>
+                <a:ea typeface="Poppins"/>
+                <a:cs typeface="Poppins"/>
+                <a:sym typeface="Poppins"/>
+              </a:rPr>
+              <a:t>OpenAI text-embedding-3-small</a:t>
+            </a:r>
+            <a:r>
+              <a:rPr lang="en-US" sz="2000" dirty="0">
+                <a:solidFill>
+                  <a:srgbClr val="343434"/>
+                </a:solidFill>
+                <a:latin typeface="Poppins"/>
+                <a:ea typeface="Poppins"/>
+                <a:cs typeface="Poppins"/>
+                <a:sym typeface="Poppins"/>
+              </a:rPr>
+              <a:t> model.</a:t>
             </a:r>
           </a:p>
           <a:p>
@@ -10852,6 +10877,53 @@
           <a:chExt cx="0" cy="0"/>
         </a:xfrm>
       </p:grpSpPr>
+      <p:cxnSp>
+        <p:nvCxnSpPr>
+          <p:cNvPr id="42" name="Straight Arrow Connector 41">
+            <a:extLst>
+              <a:ext uri="{FF2B5EF4-FFF2-40B4-BE49-F238E27FC236}">
+                <a16:creationId xmlns:a16="http://schemas.microsoft.com/office/drawing/2014/main" id="{BCC402D0-413F-4369-27FF-8BCF10AE9610}"/>
+              </a:ext>
+            </a:extLst>
+          </p:cNvPr>
+          <p:cNvCxnSpPr>
+            <a:cxnSpLocks/>
+            <a:stCxn id="33" idx="1"/>
+            <a:endCxn id="16" idx="3"/>
+          </p:cNvCxnSpPr>
+          <p:nvPr/>
+        </p:nvCxnSpPr>
+        <p:spPr>
+          <a:xfrm flipH="1">
+            <a:off x="14730431" y="6649664"/>
+            <a:ext cx="430732" cy="0"/>
+          </a:xfrm>
+          <a:prstGeom prst="straightConnector1">
+            <a:avLst/>
+          </a:prstGeom>
+          <a:ln w="31750">
+            <a:solidFill>
+              <a:schemeClr val="tx1"/>
+            </a:solidFill>
+            <a:headEnd type="triangle"/>
+            <a:tailEnd type="triangle"/>
+          </a:ln>
+        </p:spPr>
+        <p:style>
+          <a:lnRef idx="1">
+            <a:schemeClr val="accent1"/>
+          </a:lnRef>
+          <a:fillRef idx="0">
+            <a:schemeClr val="accent1"/>
+          </a:fillRef>
+          <a:effectRef idx="0">
+            <a:schemeClr val="accent1"/>
+          </a:effectRef>
+          <a:fontRef idx="minor">
+            <a:schemeClr val="tx1"/>
+          </a:fontRef>
+        </p:style>
+      </p:cxnSp>
       <p:sp>
         <p:nvSpPr>
           <p:cNvPr id="33" name="Rectangle: Rounded Corners 32">
@@ -11698,7 +11770,7 @@
         </p:nvSpPr>
         <p:spPr>
           <a:xfrm>
-            <a:off x="1034653" y="2781300"/>
+            <a:off x="1034653" y="2788548"/>
             <a:ext cx="6668497" cy="7917552"/>
           </a:xfrm>
           <a:prstGeom prst="rect">
@@ -13020,53 +13092,6 @@
           </a:p>
         </p:txBody>
       </p:sp>
-      <p:cxnSp>
-        <p:nvCxnSpPr>
-          <p:cNvPr id="42" name="Straight Arrow Connector 41">
-            <a:extLst>
-              <a:ext uri="{FF2B5EF4-FFF2-40B4-BE49-F238E27FC236}">
-                <a16:creationId xmlns:a16="http://schemas.microsoft.com/office/drawing/2014/main" id="{BCC402D0-413F-4369-27FF-8BCF10AE9610}"/>
-              </a:ext>
-            </a:extLst>
-          </p:cNvPr>
-          <p:cNvCxnSpPr>
-            <a:cxnSpLocks/>
-            <a:stCxn id="33" idx="1"/>
-            <a:endCxn id="16" idx="3"/>
-          </p:cNvCxnSpPr>
-          <p:nvPr/>
-        </p:nvCxnSpPr>
-        <p:spPr>
-          <a:xfrm flipH="1">
-            <a:off x="14730431" y="6649664"/>
-            <a:ext cx="430732" cy="0"/>
-          </a:xfrm>
-          <a:prstGeom prst="straightConnector1">
-            <a:avLst/>
-          </a:prstGeom>
-          <a:ln w="31750">
-            <a:solidFill>
-              <a:schemeClr val="tx1"/>
-            </a:solidFill>
-            <a:headEnd type="triangle"/>
-            <a:tailEnd type="triangle"/>
-          </a:ln>
-        </p:spPr>
-        <p:style>
-          <a:lnRef idx="1">
-            <a:schemeClr val="accent1"/>
-          </a:lnRef>
-          <a:fillRef idx="0">
-            <a:schemeClr val="accent1"/>
-          </a:fillRef>
-          <a:effectRef idx="0">
-            <a:schemeClr val="accent1"/>
-          </a:effectRef>
-          <a:fontRef idx="minor">
-            <a:schemeClr val="tx1"/>
-          </a:fontRef>
-        </p:style>
-      </p:cxnSp>
       <p:sp>
         <p:nvSpPr>
           <p:cNvPr id="43" name="TextBox 42">
@@ -15575,29 +15600,8 @@
                 <a:cs typeface="Poppins"/>
                 <a:sym typeface="Poppins"/>
               </a:rPr>
-              <a:t>All my application stacks are deployed Docker-container-wise to VPS. Since I have a trouble processing my payment in AWS, I cannot proceed the deployment to AWS Elastic Kubernetes Service </a:t>
-            </a:r>
-            <a:r>
-              <a:rPr lang="en-US" sz="2000">
-                <a:solidFill>
-                  <a:srgbClr val="343434"/>
-                </a:solidFill>
-                <a:latin typeface="Poppins"/>
-                <a:ea typeface="Poppins"/>
-                <a:cs typeface="Poppins"/>
-                <a:sym typeface="Poppins"/>
-              </a:rPr>
-              <a:t>or AWS Elastic Container Service as I desired. </a:t>
-            </a:r>
-            <a:endParaRPr lang="en-US" sz="2000" dirty="0">
-              <a:solidFill>
-                <a:srgbClr val="343434"/>
-              </a:solidFill>
-              <a:latin typeface="Poppins"/>
-              <a:ea typeface="Poppins"/>
-              <a:cs typeface="Poppins"/>
-              <a:sym typeface="Poppins"/>
-            </a:endParaRPr>
+              <a:t>All my application stacks are deployed Docker-container-wise to VPS. Since I have a trouble processing my payment in AWS, I cannot proceed the deployment to AWS Elastic Kubernetes Service or AWS Elastic Container Service as I desired. </a:t>
+            </a:r>
           </a:p>
         </p:txBody>
       </p:sp>
@@ -15886,6 +15890,36 @@
           </p:txBody>
         </p:sp>
       </p:grpSp>
+      <p:pic>
+        <p:nvPicPr>
+          <p:cNvPr id="12" name="Picture 11">
+            <a:extLst>
+              <a:ext uri="{FF2B5EF4-FFF2-40B4-BE49-F238E27FC236}">
+                <a16:creationId xmlns:a16="http://schemas.microsoft.com/office/drawing/2014/main" id="{10C7C3EA-6FCD-FE13-F014-11BB8C5565BC}"/>
+              </a:ext>
+            </a:extLst>
+          </p:cNvPr>
+          <p:cNvPicPr>
+            <a:picLocks noChangeAspect="1"/>
+          </p:cNvPicPr>
+          <p:nvPr/>
+        </p:nvPicPr>
+        <p:blipFill>
+          <a:blip r:embed="rId3"/>
+          <a:stretch>
+            <a:fillRect/>
+          </a:stretch>
+        </p:blipFill>
+        <p:spPr>
+          <a:xfrm>
+            <a:off x="1074246" y="3953274"/>
+            <a:ext cx="16179097" cy="4695425"/>
+          </a:xfrm>
+          <a:prstGeom prst="rect">
+            <a:avLst/>
+          </a:prstGeom>
+        </p:spPr>
+      </p:pic>
     </p:spTree>
     <p:extLst>
       <p:ext uri="{BB962C8B-B14F-4D97-AF65-F5344CB8AC3E}">
@@ -15915,7 +15949,13 @@
     </p:bg>
     <p:spTree>
       <p:nvGrpSpPr>
-        <p:cNvPr id="1" name=""/>
+        <p:cNvPr id="1" name="">
+          <a:extLst>
+            <a:ext uri="{FF2B5EF4-FFF2-40B4-BE49-F238E27FC236}">
+              <a16:creationId xmlns:a16="http://schemas.microsoft.com/office/drawing/2014/main" id="{DB8C33CC-EE5B-89C8-85D0-DFD7E1A4E00C}"/>
+            </a:ext>
+          </a:extLst>
+        </p:cNvPr>
         <p:cNvGrpSpPr/>
         <p:nvPr/>
       </p:nvGrpSpPr>
@@ -15927,9 +15967,87 @@
           <a:chExt cx="0" cy="0"/>
         </a:xfrm>
       </p:grpSpPr>
+      <p:sp>
+        <p:nvSpPr>
+          <p:cNvPr id="17" name="Freeform 17">
+            <a:extLst>
+              <a:ext uri="{FF2B5EF4-FFF2-40B4-BE49-F238E27FC236}">
+                <a16:creationId xmlns:a16="http://schemas.microsoft.com/office/drawing/2014/main" id="{18F9C1D0-9E6B-4251-CB90-41D65973C197}"/>
+              </a:ext>
+            </a:extLst>
+          </p:cNvPr>
+          <p:cNvSpPr/>
+          <p:nvPr/>
+        </p:nvSpPr>
+        <p:spPr>
+          <a:xfrm rot="-10800000">
+            <a:off x="13665094" y="1209693"/>
+            <a:ext cx="2418563" cy="1640225"/>
+          </a:xfrm>
+          <a:custGeom>
+            <a:avLst/>
+            <a:gdLst/>
+            <a:ahLst/>
+            <a:cxnLst/>
+            <a:rect l="l" t="t" r="r" b="b"/>
+            <a:pathLst>
+              <a:path w="2418563" h="1640225">
+                <a:moveTo>
+                  <a:pt x="0" y="0"/>
+                </a:moveTo>
+                <a:lnTo>
+                  <a:pt x="2418563" y="0"/>
+                </a:lnTo>
+                <a:lnTo>
+                  <a:pt x="2418563" y="1640225"/>
+                </a:lnTo>
+                <a:lnTo>
+                  <a:pt x="0" y="1640225"/>
+                </a:lnTo>
+                <a:lnTo>
+                  <a:pt x="0" y="0"/>
+                </a:lnTo>
+                <a:close/>
+              </a:path>
+            </a:pathLst>
+          </a:custGeom>
+          <a:blipFill>
+            <a:blip r:embed="rId2">
+              <a:duotone>
+                <a:schemeClr val="accent1">
+                  <a:shade val="45000"/>
+                  <a:satMod val="135000"/>
+                </a:schemeClr>
+                <a:prstClr val="white"/>
+              </a:duotone>
+              <a:extLst>
+                <a:ext uri="{96DAC541-7B7A-43D3-8B79-37D633B846F1}">
+                  <asvg:svgBlip xmlns:asvg="http://schemas.microsoft.com/office/drawing/2016/SVG/main" r:embed="rId3"/>
+                </a:ext>
+              </a:extLst>
+            </a:blip>
+            <a:stretch>
+              <a:fillRect/>
+            </a:stretch>
+          </a:blipFill>
+        </p:spPr>
+        <p:txBody>
+          <a:bodyPr/>
+          <a:lstStyle/>
+          <a:p>
+            <a:endParaRPr lang="en-ID" dirty="0"/>
+          </a:p>
+        </p:txBody>
+      </p:sp>
       <p:grpSp>
         <p:nvGrpSpPr>
-          <p:cNvPr id="9" name="Group 9"/>
+          <p:cNvPr id="9" name="Group 9">
+            <a:extLst>
+              <a:ext uri="{FF2B5EF4-FFF2-40B4-BE49-F238E27FC236}">
+                <a16:creationId xmlns:a16="http://schemas.microsoft.com/office/drawing/2014/main" id="{9B932885-1122-78A5-C64B-D94FA7DFDEA7}"/>
+              </a:ext>
+            </a:extLst>
+          </p:cNvPr>
           <p:cNvGrpSpPr/>
           <p:nvPr/>
         </p:nvGrpSpPr>
@@ -15943,7 +16061,13 @@
         </p:grpSpPr>
         <p:sp>
           <p:nvSpPr>
-            <p:cNvPr id="10" name="Freeform 10"/>
+            <p:cNvPr id="10" name="Freeform 10">
+              <a:extLst>
+                <a:ext uri="{FF2B5EF4-FFF2-40B4-BE49-F238E27FC236}">
+                  <a16:creationId xmlns:a16="http://schemas.microsoft.com/office/drawing/2014/main" id="{0CD656AC-5F8F-CB5A-2B8B-1E73774B2DFF}"/>
+                </a:ext>
+              </a:extLst>
+            </p:cNvPr>
             <p:cNvSpPr/>
             <p:nvPr/>
           </p:nvSpPr>
@@ -15990,7 +16114,13 @@
         </p:sp>
         <p:sp>
           <p:nvSpPr>
-            <p:cNvPr id="11" name="TextBox 11"/>
+            <p:cNvPr id="11" name="TextBox 11">
+              <a:extLst>
+                <a:ext uri="{FF2B5EF4-FFF2-40B4-BE49-F238E27FC236}">
+                  <a16:creationId xmlns:a16="http://schemas.microsoft.com/office/drawing/2014/main" id="{9A00830E-2655-07D8-695B-0424A071D92E}"/>
+                </a:ext>
+              </a:extLst>
+            </p:cNvPr>
             <p:cNvSpPr txBox="1"/>
             <p:nvPr/>
           </p:nvSpPr>
@@ -16022,7 +16152,13 @@
       </p:grpSp>
       <p:sp>
         <p:nvSpPr>
-          <p:cNvPr id="12" name="Freeform 12"/>
+          <p:cNvPr id="12" name="Freeform 12">
+            <a:extLst>
+              <a:ext uri="{FF2B5EF4-FFF2-40B4-BE49-F238E27FC236}">
+                <a16:creationId xmlns:a16="http://schemas.microsoft.com/office/drawing/2014/main" id="{DF4FCD18-5844-F521-42E4-8F924421CC06}"/>
+              </a:ext>
+            </a:extLst>
+          </p:cNvPr>
           <p:cNvSpPr/>
           <p:nvPr/>
         </p:nvSpPr>
@@ -16059,10 +16195,10 @@
             </a:pathLst>
           </a:custGeom>
           <a:blipFill>
-            <a:blip r:embed="rId2">
+            <a:blip r:embed="rId4">
               <a:extLst>
                 <a:ext uri="{96DAC541-7B7A-43D3-8B79-37D633B846F1}">
-                  <asvg:svgBlip xmlns:asvg="http://schemas.microsoft.com/office/drawing/2016/SVG/main" r:embed="rId3"/>
+                  <asvg:svgBlip xmlns:asvg="http://schemas.microsoft.com/office/drawing/2016/SVG/main" r:embed="rId5"/>
                 </a:ext>
               </a:extLst>
             </a:blip>
@@ -16081,7 +16217,13 @@
       </p:sp>
       <p:sp>
         <p:nvSpPr>
-          <p:cNvPr id="13" name="Freeform 13"/>
+          <p:cNvPr id="13" name="Freeform 13">
+            <a:extLst>
+              <a:ext uri="{FF2B5EF4-FFF2-40B4-BE49-F238E27FC236}">
+                <a16:creationId xmlns:a16="http://schemas.microsoft.com/office/drawing/2014/main" id="{E120C1BF-6E2C-BEE9-EE2F-E15ABFADA972}"/>
+              </a:ext>
+            </a:extLst>
+          </p:cNvPr>
           <p:cNvSpPr/>
           <p:nvPr/>
         </p:nvSpPr>
@@ -16118,10 +16260,10 @@
             </a:pathLst>
           </a:custGeom>
           <a:blipFill>
-            <a:blip r:embed="rId2">
+            <a:blip r:embed="rId4">
               <a:extLst>
                 <a:ext uri="{96DAC541-7B7A-43D3-8B79-37D633B846F1}">
-                  <asvg:svgBlip xmlns:asvg="http://schemas.microsoft.com/office/drawing/2016/SVG/main" r:embed="rId3"/>
+                  <asvg:svgBlip xmlns:asvg="http://schemas.microsoft.com/office/drawing/2016/SVG/main" r:embed="rId5"/>
                 </a:ext>
               </a:extLst>
             </a:blip>
@@ -16140,7 +16282,13 @@
       </p:sp>
       <p:sp>
         <p:nvSpPr>
-          <p:cNvPr id="14" name="Freeform 14"/>
+          <p:cNvPr id="14" name="Freeform 14">
+            <a:extLst>
+              <a:ext uri="{FF2B5EF4-FFF2-40B4-BE49-F238E27FC236}">
+                <a16:creationId xmlns:a16="http://schemas.microsoft.com/office/drawing/2014/main" id="{FF7A9485-2C28-1EC2-3733-0836C0C08111}"/>
+              </a:ext>
+            </a:extLst>
+          </p:cNvPr>
           <p:cNvSpPr/>
           <p:nvPr/>
         </p:nvSpPr>
@@ -16177,7 +16325,7 @@
             </a:pathLst>
           </a:custGeom>
           <a:blipFill>
-            <a:blip r:embed="rId4">
+            <a:blip r:embed="rId2">
               <a:duotone>
                 <a:prstClr val="black"/>
                 <a:schemeClr val="accent1">
@@ -16187,7 +16335,7 @@
               </a:duotone>
               <a:extLst>
                 <a:ext uri="{96DAC541-7B7A-43D3-8B79-37D633B846F1}">
-                  <asvg:svgBlip xmlns:asvg="http://schemas.microsoft.com/office/drawing/2016/SVG/main" r:embed="rId5"/>
+                  <asvg:svgBlip xmlns:asvg="http://schemas.microsoft.com/office/drawing/2016/SVG/main" r:embed="rId3"/>
                 </a:ext>
               </a:extLst>
             </a:blip>
@@ -16206,7 +16354,13 @@
       </p:sp>
       <p:sp>
         <p:nvSpPr>
-          <p:cNvPr id="15" name="TextBox 15"/>
+          <p:cNvPr id="15" name="TextBox 15">
+            <a:extLst>
+              <a:ext uri="{FF2B5EF4-FFF2-40B4-BE49-F238E27FC236}">
+                <a16:creationId xmlns:a16="http://schemas.microsoft.com/office/drawing/2014/main" id="{60666EDA-A160-6C28-75BC-2D94277ACCDD}"/>
+              </a:ext>
+            </a:extLst>
+          </p:cNvPr>
           <p:cNvSpPr txBox="1"/>
           <p:nvPr/>
         </p:nvSpPr>
@@ -16237,21 +16391,27 @@
                 <a:cs typeface="Coco Gothic Heavy"/>
                 <a:sym typeface="Coco Gothic Heavy"/>
               </a:rPr>
-              <a:t>Further Progress</a:t>
+              <a:t>Security Concern</a:t>
             </a:r>
           </a:p>
         </p:txBody>
       </p:sp>
       <p:sp>
         <p:nvSpPr>
-          <p:cNvPr id="16" name="TextBox 16"/>
+          <p:cNvPr id="16" name="TextBox 16">
+            <a:extLst>
+              <a:ext uri="{FF2B5EF4-FFF2-40B4-BE49-F238E27FC236}">
+                <a16:creationId xmlns:a16="http://schemas.microsoft.com/office/drawing/2014/main" id="{ABC3215E-07AA-BF55-83E3-BDBCFDDF4AE9}"/>
+              </a:ext>
+            </a:extLst>
+          </p:cNvPr>
           <p:cNvSpPr txBox="1"/>
           <p:nvPr/>
         </p:nvSpPr>
         <p:spPr>
           <a:xfrm>
-            <a:off x="8164249" y="3516313"/>
-            <a:ext cx="7894928" cy="3931846"/>
+            <a:off x="8164249" y="571500"/>
+            <a:ext cx="7894928" cy="9028113"/>
           </a:xfrm>
           <a:prstGeom prst="rect">
             <a:avLst/>
@@ -16275,128 +16435,164 @@
                 <a:cs typeface="Poppins"/>
                 <a:sym typeface="Poppins"/>
               </a:rPr>
-              <a:t>For the further progress, I realize that Classifier Service is still context-agnostic and just blindly hard-strict-categorize prompt without any semantic understanding, so, in the next version, I am aiming to deploy </a:t>
-            </a:r>
+              <a:t>Here I will explain the reasons of why my Application is safe.</a:t>
+            </a:r>
+          </a:p>
+          <a:p>
+            <a:pPr algn="just">
+              <a:lnSpc>
+                <a:spcPts val="2800"/>
+              </a:lnSpc>
+            </a:pPr>
+            <a:endParaRPr lang="en-US" sz="2000" dirty="0">
+              <a:latin typeface="Poppins"/>
+              <a:ea typeface="Poppins"/>
+              <a:cs typeface="Poppins"/>
+              <a:sym typeface="Poppins"/>
+            </a:endParaRPr>
+          </a:p>
+          <a:p>
             <a:r>
               <a:rPr lang="en-US" sz="2000" b="1" dirty="0">
-                <a:latin typeface="Poppins"/>
-                <a:ea typeface="Poppins"/>
-                <a:cs typeface="Poppins"/>
-                <a:sym typeface="Poppins"/>
+                <a:latin typeface="Poppins" panose="00000500000000000000" pitchFamily="2" charset="0"/>
+                <a:cs typeface="Poppins" panose="00000500000000000000" pitchFamily="2" charset="0"/>
               </a:rPr>
-              <a:t>Context Service</a:t>
-            </a:r>
+              <a:t>1. Reduced Attack Surface via Compiled Binaries</a:t>
+            </a:r>
+          </a:p>
+          <a:p>
             <a:r>
               <a:rPr lang="en-US" sz="2000" dirty="0">
-                <a:latin typeface="Poppins"/>
-                <a:ea typeface="Poppins"/>
-                <a:cs typeface="Poppins"/>
-                <a:sym typeface="Poppins"/>
+                <a:latin typeface="Poppins" panose="00000500000000000000" pitchFamily="2" charset="0"/>
+                <a:cs typeface="Poppins" panose="00000500000000000000" pitchFamily="2" charset="0"/>
               </a:rPr>
-              <a:t> which is context-aware to the prompt. This new service</a:t>
+              <a:t>By using </a:t>
             </a:r>
             <a:r>
               <a:rPr lang="en-US" sz="2000" b="1" dirty="0">
-                <a:latin typeface="Poppins"/>
-                <a:ea typeface="Poppins"/>
-                <a:cs typeface="Poppins"/>
-                <a:sym typeface="Poppins"/>
+                <a:latin typeface="Poppins" panose="00000500000000000000" pitchFamily="2" charset="0"/>
+                <a:cs typeface="Poppins" panose="00000500000000000000" pitchFamily="2" charset="0"/>
               </a:rPr>
-              <a:t> </a:t>
+              <a:t>Go</a:t>
             </a:r>
             <a:r>
               <a:rPr lang="en-US" sz="2000" dirty="0">
-                <a:latin typeface="Poppins"/>
-                <a:ea typeface="Poppins"/>
-                <a:cs typeface="Poppins"/>
-                <a:sym typeface="Poppins"/>
+                <a:latin typeface="Poppins" panose="00000500000000000000" pitchFamily="2" charset="0"/>
+                <a:cs typeface="Poppins" panose="00000500000000000000" pitchFamily="2" charset="0"/>
               </a:rPr>
-              <a:t>will implement </a:t>
-            </a:r>
-            <a:r>
-              <a:rPr lang="en-US" sz="2000" i="1" dirty="0">
-                <a:latin typeface="Poppins"/>
-                <a:ea typeface="Poppins"/>
-                <a:cs typeface="Poppins"/>
-                <a:sym typeface="Poppins"/>
+              <a:t>, a statically compiled language, the production environment does not require a language interpreter (like Python or Node.js) or source code to be present on the server. This significantly limits the tools available to an attacker, effectively mitigating common scripting engine exploits and making the environment inherently more resilient against unauthorized code execution.</a:t>
+            </a:r>
+          </a:p>
+          <a:p>
+            <a:endParaRPr lang="en-US" sz="2000" dirty="0">
+              <a:latin typeface="Poppins" panose="00000500000000000000" pitchFamily="2" charset="0"/>
+              <a:cs typeface="Poppins" panose="00000500000000000000" pitchFamily="2" charset="0"/>
+            </a:endParaRPr>
+          </a:p>
+          <a:p>
+            <a:r>
+              <a:rPr lang="en-US" sz="2000" b="1" dirty="0">
+                <a:latin typeface="Poppins" panose="00000500000000000000" pitchFamily="2" charset="0"/>
+                <a:cs typeface="Poppins" panose="00000500000000000000" pitchFamily="2" charset="0"/>
               </a:rPr>
-              <a:t>Transformers-Embedding-Transformers</a:t>
+              <a:t>2. Type-Safe Data Persistence with Ent ORM</a:t>
+            </a:r>
+          </a:p>
+          <a:p>
+            <a:r>
+              <a:rPr lang="en-US" sz="2000" b="1" dirty="0">
+                <a:latin typeface="Poppins" panose="00000500000000000000" pitchFamily="2" charset="0"/>
+                <a:cs typeface="Poppins" panose="00000500000000000000" pitchFamily="2" charset="0"/>
+              </a:rPr>
+              <a:t>Kratos-Go Microservices</a:t>
             </a:r>
             <a:r>
               <a:rPr lang="en-US" sz="2000" dirty="0">
-                <a:latin typeface="Poppins"/>
-                <a:ea typeface="Poppins"/>
-                <a:cs typeface="Poppins"/>
-                <a:sym typeface="Poppins"/>
+                <a:latin typeface="Poppins" panose="00000500000000000000" pitchFamily="2" charset="0"/>
+                <a:cs typeface="Poppins" panose="00000500000000000000" pitchFamily="2" charset="0"/>
               </a:rPr>
-              <a:t> architecture to properly map user prompt to the exact desired meaning. This approach of-course requires a super big dataset and high quality of computational resources as a trade-of. Currently I don’t have any of that requirements, so it might be takes time to get everything ready.</a:t>
-            </a:r>
-          </a:p>
-        </p:txBody>
-      </p:sp>
-      <p:sp>
-        <p:nvSpPr>
-          <p:cNvPr id="17" name="Freeform 17"/>
-          <p:cNvSpPr/>
-          <p:nvPr/>
-        </p:nvSpPr>
-        <p:spPr>
-          <a:xfrm rot="-10800000">
-            <a:off x="13665094" y="1209693"/>
-            <a:ext cx="2418563" cy="1640225"/>
-          </a:xfrm>
-          <a:custGeom>
-            <a:avLst/>
-            <a:gdLst/>
-            <a:ahLst/>
-            <a:cxnLst/>
-            <a:rect l="l" t="t" r="r" b="b"/>
-            <a:pathLst>
-              <a:path w="2418563" h="1640225">
-                <a:moveTo>
-                  <a:pt x="0" y="0"/>
-                </a:moveTo>
-                <a:lnTo>
-                  <a:pt x="2418563" y="0"/>
-                </a:lnTo>
-                <a:lnTo>
-                  <a:pt x="2418563" y="1640225"/>
-                </a:lnTo>
-                <a:lnTo>
-                  <a:pt x="0" y="1640225"/>
-                </a:lnTo>
-                <a:lnTo>
-                  <a:pt x="0" y="0"/>
-                </a:lnTo>
-                <a:close/>
-              </a:path>
-            </a:pathLst>
-          </a:custGeom>
-          <a:blipFill>
-            <a:blip r:embed="rId4">
-              <a:duotone>
-                <a:schemeClr val="accent1">
-                  <a:shade val="45000"/>
-                  <a:satMod val="135000"/>
-                </a:schemeClr>
-                <a:prstClr val="white"/>
-              </a:duotone>
-              <a:extLst>
-                <a:ext uri="{96DAC541-7B7A-43D3-8B79-37D633B846F1}">
-                  <asvg:svgBlip xmlns:asvg="http://schemas.microsoft.com/office/drawing/2016/SVG/main" r:embed="rId5"/>
-                </a:ext>
-              </a:extLst>
-            </a:blip>
-            <a:stretch>
-              <a:fillRect/>
-            </a:stretch>
-          </a:blipFill>
-        </p:spPr>
-        <p:txBody>
-          <a:bodyPr/>
-          <a:lstStyle/>
-          <a:p>
-            <a:endParaRPr lang="en-ID" dirty="0"/>
+              <a:t> utilize </a:t>
+            </a:r>
+            <a:r>
+              <a:rPr lang="en-US" sz="2000" b="1" dirty="0">
+                <a:latin typeface="Poppins" panose="00000500000000000000" pitchFamily="2" charset="0"/>
+                <a:cs typeface="Poppins" panose="00000500000000000000" pitchFamily="2" charset="0"/>
+              </a:rPr>
+              <a:t>Ent ORM</a:t>
+            </a:r>
+            <a:r>
+              <a:rPr lang="en-US" sz="2000" dirty="0">
+                <a:latin typeface="Poppins" panose="00000500000000000000" pitchFamily="2" charset="0"/>
+                <a:cs typeface="Poppins" panose="00000500000000000000" pitchFamily="2" charset="0"/>
+              </a:rPr>
+              <a:t>, which enforces strict type-safety and uses </a:t>
+            </a:r>
+            <a:r>
+              <a:rPr lang="en-US" sz="2000" b="1" dirty="0">
+                <a:latin typeface="Poppins" panose="00000500000000000000" pitchFamily="2" charset="0"/>
+                <a:cs typeface="Poppins" panose="00000500000000000000" pitchFamily="2" charset="0"/>
+              </a:rPr>
+              <a:t>parameterized queries</a:t>
+            </a:r>
+            <a:r>
+              <a:rPr lang="en-US" sz="2000" dirty="0">
+                <a:latin typeface="Poppins" panose="00000500000000000000" pitchFamily="2" charset="0"/>
+                <a:cs typeface="Poppins" panose="00000500000000000000" pitchFamily="2" charset="0"/>
+              </a:rPr>
+              <a:t> for all database interactions. By abstracting the data layer through Meta’s high-performance framework, we programmatically prevent SQL Injection vulnerabilities. This ensures that user input is never executed as command logic at the database level.</a:t>
+            </a:r>
+          </a:p>
+          <a:p>
+            <a:endParaRPr lang="en-US" sz="2000" dirty="0">
+              <a:latin typeface="Poppins" panose="00000500000000000000" pitchFamily="2" charset="0"/>
+              <a:cs typeface="Poppins" panose="00000500000000000000" pitchFamily="2" charset="0"/>
+            </a:endParaRPr>
+          </a:p>
+          <a:p>
+            <a:r>
+              <a:rPr lang="en-US" sz="2000" b="1" dirty="0">
+                <a:latin typeface="Poppins" panose="00000500000000000000" pitchFamily="2" charset="0"/>
+                <a:cs typeface="Poppins" panose="00000500000000000000" pitchFamily="2" charset="0"/>
+              </a:rPr>
+              <a:t>3. Containerized Microservice Isolation</a:t>
+            </a:r>
+          </a:p>
+          <a:p>
+            <a:r>
+              <a:rPr lang="en-US" sz="2000" dirty="0">
+                <a:latin typeface="Poppins" panose="00000500000000000000" pitchFamily="2" charset="0"/>
+                <a:cs typeface="Poppins" panose="00000500000000000000" pitchFamily="2" charset="0"/>
+              </a:rPr>
+              <a:t>The application is deployed using a </a:t>
+            </a:r>
+            <a:r>
+              <a:rPr lang="en-US" sz="2000" b="1" dirty="0">
+                <a:latin typeface="Poppins" panose="00000500000000000000" pitchFamily="2" charset="0"/>
+                <a:cs typeface="Poppins" panose="00000500000000000000" pitchFamily="2" charset="0"/>
+              </a:rPr>
+              <a:t>Microservices Architecture</a:t>
+            </a:r>
+            <a:r>
+              <a:rPr lang="en-US" sz="2000" dirty="0">
+                <a:latin typeface="Poppins" panose="00000500000000000000" pitchFamily="2" charset="0"/>
+                <a:cs typeface="Poppins" panose="00000500000000000000" pitchFamily="2" charset="0"/>
+              </a:rPr>
+              <a:t> where each component is isolated within its own </a:t>
+            </a:r>
+            <a:r>
+              <a:rPr lang="en-US" sz="2000" b="1" dirty="0">
+                <a:latin typeface="Poppins" panose="00000500000000000000" pitchFamily="2" charset="0"/>
+                <a:cs typeface="Poppins" panose="00000500000000000000" pitchFamily="2" charset="0"/>
+              </a:rPr>
+              <a:t>Docker container</a:t>
+            </a:r>
+            <a:r>
+              <a:rPr lang="en-US" sz="2000" dirty="0">
+                <a:latin typeface="Poppins" panose="00000500000000000000" pitchFamily="2" charset="0"/>
+                <a:cs typeface="Poppins" panose="00000500000000000000" pitchFamily="2" charset="0"/>
+              </a:rPr>
+              <a:t>. This provides logical sandboxing and namespace isolation. By restricting inter-container communication to specific, encrypted pathways, this containerization strategy minimizes the risk of lateral movement, ensuring that a compromise in one service does not grant immediate access to the entire infrastructure.</a:t>
+            </a:r>
           </a:p>
         </p:txBody>
       </p:sp>
@@ -16405,7 +16601,7 @@
           <p:cNvPr id="18" name="TextBox 3">
             <a:extLst>
               <a:ext uri="{FF2B5EF4-FFF2-40B4-BE49-F238E27FC236}">
-                <a16:creationId xmlns:a16="http://schemas.microsoft.com/office/drawing/2014/main" id="{2B0270F3-5296-BD09-A3D2-BFB32D1A4C68}"/>
+                <a16:creationId xmlns:a16="http://schemas.microsoft.com/office/drawing/2014/main" id="{F60AFD48-1280-B9F9-F83F-AA445F222D90}"/>
               </a:ext>
             </a:extLst>
           </p:cNvPr>
@@ -16452,7 +16648,7 @@
           <p:cNvPr id="19" name="TextBox 4">
             <a:extLst>
               <a:ext uri="{FF2B5EF4-FFF2-40B4-BE49-F238E27FC236}">
-                <a16:creationId xmlns:a16="http://schemas.microsoft.com/office/drawing/2014/main" id="{F3B30931-8D0A-BCFC-E7D3-40DA62D9F871}"/>
+                <a16:creationId xmlns:a16="http://schemas.microsoft.com/office/drawing/2014/main" id="{842B1933-CD97-3166-4DC7-444EDC3C3383}"/>
               </a:ext>
             </a:extLst>
           </p:cNvPr>
@@ -16499,7 +16695,7 @@
           <p:cNvPr id="20" name="Picture 19">
             <a:extLst>
               <a:ext uri="{FF2B5EF4-FFF2-40B4-BE49-F238E27FC236}">
-                <a16:creationId xmlns:a16="http://schemas.microsoft.com/office/drawing/2014/main" id="{CA6A5C74-D7EE-009B-E7BC-7C7AE2339AC8}"/>
+                <a16:creationId xmlns:a16="http://schemas.microsoft.com/office/drawing/2014/main" id="{AFA5AA20-54A0-C10C-2A3B-9A5A1379DEF8}"/>
               </a:ext>
             </a:extLst>
           </p:cNvPr>
@@ -16535,7 +16731,7 @@
           <p:cNvPr id="25" name="Group 17">
             <a:extLst>
               <a:ext uri="{FF2B5EF4-FFF2-40B4-BE49-F238E27FC236}">
-                <a16:creationId xmlns:a16="http://schemas.microsoft.com/office/drawing/2014/main" id="{0AE9E9F3-060E-C665-D34F-20B0CD1E31D6}"/>
+                <a16:creationId xmlns:a16="http://schemas.microsoft.com/office/drawing/2014/main" id="{68A73516-E573-6077-FDDD-D407B6C89BB4}"/>
               </a:ext>
             </a:extLst>
           </p:cNvPr>
@@ -16555,7 +16751,7 @@
             <p:cNvPr id="26" name="TextBox 18">
               <a:extLst>
                 <a:ext uri="{FF2B5EF4-FFF2-40B4-BE49-F238E27FC236}">
-                  <a16:creationId xmlns:a16="http://schemas.microsoft.com/office/drawing/2014/main" id="{5080063C-1D14-298E-669B-618E2509075A}"/>
+                  <a16:creationId xmlns:a16="http://schemas.microsoft.com/office/drawing/2014/main" id="{5E129F41-8B10-7C7B-C366-2251BD569C91}"/>
                 </a:ext>
               </a:extLst>
             </p:cNvPr>
@@ -16602,7 +16798,7 @@
             <p:cNvPr id="27" name="TextBox 19">
               <a:extLst>
                 <a:ext uri="{FF2B5EF4-FFF2-40B4-BE49-F238E27FC236}">
-                  <a16:creationId xmlns:a16="http://schemas.microsoft.com/office/drawing/2014/main" id="{10223FE2-C455-D7E0-1169-9614548AE5D6}"/>
+                  <a16:creationId xmlns:a16="http://schemas.microsoft.com/office/drawing/2014/main" id="{E3A27D3D-9715-FC4E-CE76-C86CB70D8EED}"/>
                 </a:ext>
               </a:extLst>
             </p:cNvPr>
@@ -16649,7 +16845,7 @@
             <p:cNvPr id="28" name="AutoShape 20">
               <a:extLst>
                 <a:ext uri="{FF2B5EF4-FFF2-40B4-BE49-F238E27FC236}">
-                  <a16:creationId xmlns:a16="http://schemas.microsoft.com/office/drawing/2014/main" id="{74C86D43-316E-2920-6F79-0093FB373B11}"/>
+                  <a16:creationId xmlns:a16="http://schemas.microsoft.com/office/drawing/2014/main" id="{88DBA01C-9C36-286F-25C0-0E992A445719}"/>
                 </a:ext>
               </a:extLst>
             </p:cNvPr>
@@ -16686,6 +16882,11 @@
         </p:sp>
       </p:grpSp>
     </p:spTree>
+    <p:extLst>
+      <p:ext uri="{BB962C8B-B14F-4D97-AF65-F5344CB8AC3E}">
+        <p14:creationId xmlns:p14="http://schemas.microsoft.com/office/powerpoint/2010/main" val="3393682308"/>
+      </p:ext>
+    </p:extLst>
   </p:cSld>
   <p:clrMapOvr>
     <a:masterClrMapping/>
@@ -17322,6 +17523,800 @@
     </p:bg>
     <p:spTree>
       <p:nvGrpSpPr>
+        <p:cNvPr id="1" name=""/>
+        <p:cNvGrpSpPr/>
+        <p:nvPr/>
+      </p:nvGrpSpPr>
+      <p:grpSpPr>
+        <a:xfrm>
+          <a:off x="0" y="0"/>
+          <a:ext cx="0" cy="0"/>
+          <a:chOff x="0" y="0"/>
+          <a:chExt cx="0" cy="0"/>
+        </a:xfrm>
+      </p:grpSpPr>
+      <p:grpSp>
+        <p:nvGrpSpPr>
+          <p:cNvPr id="9" name="Group 9"/>
+          <p:cNvGrpSpPr/>
+          <p:nvPr/>
+        </p:nvGrpSpPr>
+        <p:grpSpPr>
+          <a:xfrm>
+            <a:off x="7470309" y="3432372"/>
+            <a:ext cx="63671" cy="3422255"/>
+            <a:chOff x="0" y="0"/>
+            <a:chExt cx="16769" cy="901335"/>
+          </a:xfrm>
+        </p:grpSpPr>
+        <p:sp>
+          <p:nvSpPr>
+            <p:cNvPr id="10" name="Freeform 10"/>
+            <p:cNvSpPr/>
+            <p:nvPr/>
+          </p:nvSpPr>
+          <p:spPr>
+            <a:xfrm>
+              <a:off x="0" y="0"/>
+              <a:ext cx="16769" cy="901335"/>
+            </a:xfrm>
+            <a:custGeom>
+              <a:avLst/>
+              <a:gdLst/>
+              <a:ahLst/>
+              <a:cxnLst/>
+              <a:rect l="l" t="t" r="r" b="b"/>
+              <a:pathLst>
+                <a:path w="16769" h="901335">
+                  <a:moveTo>
+                    <a:pt x="0" y="0"/>
+                  </a:moveTo>
+                  <a:lnTo>
+                    <a:pt x="16769" y="0"/>
+                  </a:lnTo>
+                  <a:lnTo>
+                    <a:pt x="16769" y="901335"/>
+                  </a:lnTo>
+                  <a:lnTo>
+                    <a:pt x="0" y="901335"/>
+                  </a:lnTo>
+                  <a:close/>
+                </a:path>
+              </a:pathLst>
+            </a:custGeom>
+            <a:solidFill>
+              <a:srgbClr val="FFFFFF"/>
+            </a:solidFill>
+          </p:spPr>
+          <p:txBody>
+            <a:bodyPr/>
+            <a:lstStyle/>
+            <a:p>
+              <a:endParaRPr lang="en-ID"/>
+            </a:p>
+          </p:txBody>
+        </p:sp>
+        <p:sp>
+          <p:nvSpPr>
+            <p:cNvPr id="11" name="TextBox 11"/>
+            <p:cNvSpPr txBox="1"/>
+            <p:nvPr/>
+          </p:nvSpPr>
+          <p:spPr>
+            <a:xfrm>
+              <a:off x="0" y="-57150"/>
+              <a:ext cx="16769" cy="958485"/>
+            </a:xfrm>
+            <a:prstGeom prst="rect">
+              <a:avLst/>
+            </a:prstGeom>
+          </p:spPr>
+          <p:txBody>
+            <a:bodyPr lIns="50800" tIns="50800" rIns="50800" bIns="50800" rtlCol="0" anchor="ctr"/>
+            <a:lstStyle/>
+            <a:p>
+              <a:pPr algn="ctr">
+                <a:lnSpc>
+                  <a:spcPts val="2659"/>
+                </a:lnSpc>
+                <a:spcBef>
+                  <a:spcPct val="0"/>
+                </a:spcBef>
+              </a:pPr>
+              <a:endParaRPr/>
+            </a:p>
+          </p:txBody>
+        </p:sp>
+      </p:grpSp>
+      <p:sp>
+        <p:nvSpPr>
+          <p:cNvPr id="12" name="Freeform 12"/>
+          <p:cNvSpPr/>
+          <p:nvPr/>
+        </p:nvSpPr>
+        <p:spPr>
+          <a:xfrm>
+            <a:off x="-299501" y="8580145"/>
+            <a:ext cx="3711297" cy="1356310"/>
+          </a:xfrm>
+          <a:custGeom>
+            <a:avLst/>
+            <a:gdLst/>
+            <a:ahLst/>
+            <a:cxnLst/>
+            <a:rect l="l" t="t" r="r" b="b"/>
+            <a:pathLst>
+              <a:path w="3711297" h="1356310">
+                <a:moveTo>
+                  <a:pt x="0" y="0"/>
+                </a:moveTo>
+                <a:lnTo>
+                  <a:pt x="3711297" y="0"/>
+                </a:lnTo>
+                <a:lnTo>
+                  <a:pt x="3711297" y="1356310"/>
+                </a:lnTo>
+                <a:lnTo>
+                  <a:pt x="0" y="1356310"/>
+                </a:lnTo>
+                <a:lnTo>
+                  <a:pt x="0" y="0"/>
+                </a:lnTo>
+                <a:close/>
+              </a:path>
+            </a:pathLst>
+          </a:custGeom>
+          <a:blipFill>
+            <a:blip r:embed="rId2">
+              <a:extLst>
+                <a:ext uri="{96DAC541-7B7A-43D3-8B79-37D633B846F1}">
+                  <asvg:svgBlip xmlns:asvg="http://schemas.microsoft.com/office/drawing/2016/SVG/main" r:embed="rId3"/>
+                </a:ext>
+              </a:extLst>
+            </a:blip>
+            <a:stretch>
+              <a:fillRect/>
+            </a:stretch>
+          </a:blipFill>
+        </p:spPr>
+        <p:txBody>
+          <a:bodyPr/>
+          <a:lstStyle/>
+          <a:p>
+            <a:endParaRPr lang="en-ID"/>
+          </a:p>
+        </p:txBody>
+      </p:sp>
+      <p:sp>
+        <p:nvSpPr>
+          <p:cNvPr id="13" name="Freeform 13"/>
+          <p:cNvSpPr/>
+          <p:nvPr/>
+        </p:nvSpPr>
+        <p:spPr>
+          <a:xfrm>
+            <a:off x="14874375" y="350545"/>
+            <a:ext cx="3711297" cy="1356310"/>
+          </a:xfrm>
+          <a:custGeom>
+            <a:avLst/>
+            <a:gdLst/>
+            <a:ahLst/>
+            <a:cxnLst/>
+            <a:rect l="l" t="t" r="r" b="b"/>
+            <a:pathLst>
+              <a:path w="3711297" h="1356310">
+                <a:moveTo>
+                  <a:pt x="0" y="0"/>
+                </a:moveTo>
+                <a:lnTo>
+                  <a:pt x="3711297" y="0"/>
+                </a:lnTo>
+                <a:lnTo>
+                  <a:pt x="3711297" y="1356310"/>
+                </a:lnTo>
+                <a:lnTo>
+                  <a:pt x="0" y="1356310"/>
+                </a:lnTo>
+                <a:lnTo>
+                  <a:pt x="0" y="0"/>
+                </a:lnTo>
+                <a:close/>
+              </a:path>
+            </a:pathLst>
+          </a:custGeom>
+          <a:blipFill>
+            <a:blip r:embed="rId2">
+              <a:extLst>
+                <a:ext uri="{96DAC541-7B7A-43D3-8B79-37D633B846F1}">
+                  <asvg:svgBlip xmlns:asvg="http://schemas.microsoft.com/office/drawing/2016/SVG/main" r:embed="rId3"/>
+                </a:ext>
+              </a:extLst>
+            </a:blip>
+            <a:stretch>
+              <a:fillRect/>
+            </a:stretch>
+          </a:blipFill>
+        </p:spPr>
+        <p:txBody>
+          <a:bodyPr/>
+          <a:lstStyle/>
+          <a:p>
+            <a:endParaRPr lang="en-ID"/>
+          </a:p>
+        </p:txBody>
+      </p:sp>
+      <p:sp>
+        <p:nvSpPr>
+          <p:cNvPr id="14" name="Freeform 14"/>
+          <p:cNvSpPr/>
+          <p:nvPr/>
+        </p:nvSpPr>
+        <p:spPr>
+          <a:xfrm>
+            <a:off x="1578616" y="6526482"/>
+            <a:ext cx="3666360" cy="2486459"/>
+          </a:xfrm>
+          <a:custGeom>
+            <a:avLst/>
+            <a:gdLst/>
+            <a:ahLst/>
+            <a:cxnLst/>
+            <a:rect l="l" t="t" r="r" b="b"/>
+            <a:pathLst>
+              <a:path w="3666360" h="2486459">
+                <a:moveTo>
+                  <a:pt x="0" y="0"/>
+                </a:moveTo>
+                <a:lnTo>
+                  <a:pt x="3666360" y="0"/>
+                </a:lnTo>
+                <a:lnTo>
+                  <a:pt x="3666360" y="2486458"/>
+                </a:lnTo>
+                <a:lnTo>
+                  <a:pt x="0" y="2486458"/>
+                </a:lnTo>
+                <a:lnTo>
+                  <a:pt x="0" y="0"/>
+                </a:lnTo>
+                <a:close/>
+              </a:path>
+            </a:pathLst>
+          </a:custGeom>
+          <a:blipFill>
+            <a:blip r:embed="rId4">
+              <a:duotone>
+                <a:prstClr val="black"/>
+                <a:schemeClr val="accent1">
+                  <a:tint val="45000"/>
+                  <a:satMod val="400000"/>
+                </a:schemeClr>
+              </a:duotone>
+              <a:extLst>
+                <a:ext uri="{96DAC541-7B7A-43D3-8B79-37D633B846F1}">
+                  <asvg:svgBlip xmlns:asvg="http://schemas.microsoft.com/office/drawing/2016/SVG/main" r:embed="rId5"/>
+                </a:ext>
+              </a:extLst>
+            </a:blip>
+            <a:stretch>
+              <a:fillRect/>
+            </a:stretch>
+          </a:blipFill>
+        </p:spPr>
+        <p:txBody>
+          <a:bodyPr/>
+          <a:lstStyle/>
+          <a:p>
+            <a:endParaRPr lang="en-ID"/>
+          </a:p>
+        </p:txBody>
+      </p:sp>
+      <p:sp>
+        <p:nvSpPr>
+          <p:cNvPr id="15" name="TextBox 15"/>
+          <p:cNvSpPr txBox="1"/>
+          <p:nvPr/>
+        </p:nvSpPr>
+        <p:spPr>
+          <a:xfrm>
+            <a:off x="1828447" y="4699635"/>
+            <a:ext cx="5485491" cy="1733488"/>
+          </a:xfrm>
+          <a:prstGeom prst="rect">
+            <a:avLst/>
+          </a:prstGeom>
+        </p:spPr>
+        <p:txBody>
+          <a:bodyPr lIns="0" tIns="0" rIns="0" bIns="0" rtlCol="0" anchor="t">
+            <a:spAutoFit/>
+          </a:bodyPr>
+          <a:lstStyle/>
+          <a:p>
+            <a:pPr algn="ctr">
+              <a:lnSpc>
+                <a:spcPts val="6660"/>
+              </a:lnSpc>
+            </a:pPr>
+            <a:r>
+              <a:rPr lang="en-US" sz="6000" b="1" dirty="0">
+                <a:latin typeface="Coco Gothic Heavy"/>
+                <a:ea typeface="Coco Gothic Heavy"/>
+                <a:cs typeface="Coco Gothic Heavy"/>
+                <a:sym typeface="Coco Gothic Heavy"/>
+              </a:rPr>
+              <a:t>Further Progress</a:t>
+            </a:r>
+          </a:p>
+        </p:txBody>
+      </p:sp>
+      <p:sp>
+        <p:nvSpPr>
+          <p:cNvPr id="16" name="TextBox 16"/>
+          <p:cNvSpPr txBox="1"/>
+          <p:nvPr/>
+        </p:nvSpPr>
+        <p:spPr>
+          <a:xfrm>
+            <a:off x="8164249" y="3516313"/>
+            <a:ext cx="7894928" cy="3931846"/>
+          </a:xfrm>
+          <a:prstGeom prst="rect">
+            <a:avLst/>
+          </a:prstGeom>
+        </p:spPr>
+        <p:txBody>
+          <a:bodyPr lIns="0" tIns="0" rIns="0" bIns="0" rtlCol="0" anchor="t">
+            <a:spAutoFit/>
+          </a:bodyPr>
+          <a:lstStyle/>
+          <a:p>
+            <a:pPr algn="just">
+              <a:lnSpc>
+                <a:spcPts val="2800"/>
+              </a:lnSpc>
+            </a:pPr>
+            <a:r>
+              <a:rPr lang="en-US" sz="2000" dirty="0">
+                <a:latin typeface="Poppins"/>
+                <a:ea typeface="Poppins"/>
+                <a:cs typeface="Poppins"/>
+                <a:sym typeface="Poppins"/>
+              </a:rPr>
+              <a:t>For the further progress, I realize that Classifier Service is still context-agnostic and just blindly hard-strict-categorize prompt without any semantic understanding, so, in the next version, I am aiming to deploy </a:t>
+            </a:r>
+            <a:r>
+              <a:rPr lang="en-US" sz="2000" b="1" dirty="0">
+                <a:latin typeface="Poppins"/>
+                <a:ea typeface="Poppins"/>
+                <a:cs typeface="Poppins"/>
+                <a:sym typeface="Poppins"/>
+              </a:rPr>
+              <a:t>Context Service</a:t>
+            </a:r>
+            <a:r>
+              <a:rPr lang="en-US" sz="2000" dirty="0">
+                <a:latin typeface="Poppins"/>
+                <a:ea typeface="Poppins"/>
+                <a:cs typeface="Poppins"/>
+                <a:sym typeface="Poppins"/>
+              </a:rPr>
+              <a:t> which is context-aware to the prompt. This new service</a:t>
+            </a:r>
+            <a:r>
+              <a:rPr lang="en-US" sz="2000" b="1" dirty="0">
+                <a:latin typeface="Poppins"/>
+                <a:ea typeface="Poppins"/>
+                <a:cs typeface="Poppins"/>
+                <a:sym typeface="Poppins"/>
+              </a:rPr>
+              <a:t> </a:t>
+            </a:r>
+            <a:r>
+              <a:rPr lang="en-US" sz="2000" dirty="0">
+                <a:latin typeface="Poppins"/>
+                <a:ea typeface="Poppins"/>
+                <a:cs typeface="Poppins"/>
+                <a:sym typeface="Poppins"/>
+              </a:rPr>
+              <a:t>will implement </a:t>
+            </a:r>
+            <a:r>
+              <a:rPr lang="en-US" sz="2000" i="1" dirty="0">
+                <a:latin typeface="Poppins"/>
+                <a:ea typeface="Poppins"/>
+                <a:cs typeface="Poppins"/>
+                <a:sym typeface="Poppins"/>
+              </a:rPr>
+              <a:t>Transformers-Embedding-Transformers</a:t>
+            </a:r>
+            <a:r>
+              <a:rPr lang="en-US" sz="2000" dirty="0">
+                <a:latin typeface="Poppins"/>
+                <a:ea typeface="Poppins"/>
+                <a:cs typeface="Poppins"/>
+                <a:sym typeface="Poppins"/>
+              </a:rPr>
+              <a:t> architecture to properly map user prompt to the exact desired meaning. This approach of-course requires a super big dataset and high quality of computational resources as a trade-of. Currently I don’t have any of that requirements, so it might be takes time to get everything ready.</a:t>
+            </a:r>
+          </a:p>
+        </p:txBody>
+      </p:sp>
+      <p:sp>
+        <p:nvSpPr>
+          <p:cNvPr id="17" name="Freeform 17"/>
+          <p:cNvSpPr/>
+          <p:nvPr/>
+        </p:nvSpPr>
+        <p:spPr>
+          <a:xfrm rot="-10800000">
+            <a:off x="13665094" y="1209693"/>
+            <a:ext cx="2418563" cy="1640225"/>
+          </a:xfrm>
+          <a:custGeom>
+            <a:avLst/>
+            <a:gdLst/>
+            <a:ahLst/>
+            <a:cxnLst/>
+            <a:rect l="l" t="t" r="r" b="b"/>
+            <a:pathLst>
+              <a:path w="2418563" h="1640225">
+                <a:moveTo>
+                  <a:pt x="0" y="0"/>
+                </a:moveTo>
+                <a:lnTo>
+                  <a:pt x="2418563" y="0"/>
+                </a:lnTo>
+                <a:lnTo>
+                  <a:pt x="2418563" y="1640225"/>
+                </a:lnTo>
+                <a:lnTo>
+                  <a:pt x="0" y="1640225"/>
+                </a:lnTo>
+                <a:lnTo>
+                  <a:pt x="0" y="0"/>
+                </a:lnTo>
+                <a:close/>
+              </a:path>
+            </a:pathLst>
+          </a:custGeom>
+          <a:blipFill>
+            <a:blip r:embed="rId4">
+              <a:duotone>
+                <a:schemeClr val="accent1">
+                  <a:shade val="45000"/>
+                  <a:satMod val="135000"/>
+                </a:schemeClr>
+                <a:prstClr val="white"/>
+              </a:duotone>
+              <a:extLst>
+                <a:ext uri="{96DAC541-7B7A-43D3-8B79-37D633B846F1}">
+                  <asvg:svgBlip xmlns:asvg="http://schemas.microsoft.com/office/drawing/2016/SVG/main" r:embed="rId5"/>
+                </a:ext>
+              </a:extLst>
+            </a:blip>
+            <a:stretch>
+              <a:fillRect/>
+            </a:stretch>
+          </a:blipFill>
+        </p:spPr>
+        <p:txBody>
+          <a:bodyPr/>
+          <a:lstStyle/>
+          <a:p>
+            <a:endParaRPr lang="en-ID" dirty="0"/>
+          </a:p>
+        </p:txBody>
+      </p:sp>
+      <p:sp>
+        <p:nvSpPr>
+          <p:cNvPr id="18" name="TextBox 3">
+            <a:extLst>
+              <a:ext uri="{FF2B5EF4-FFF2-40B4-BE49-F238E27FC236}">
+                <a16:creationId xmlns:a16="http://schemas.microsoft.com/office/drawing/2014/main" id="{2B0270F3-5296-BD09-A3D2-BFB32D1A4C68}"/>
+              </a:ext>
+            </a:extLst>
+          </p:cNvPr>
+          <p:cNvSpPr txBox="1"/>
+          <p:nvPr/>
+        </p:nvSpPr>
+        <p:spPr>
+          <a:xfrm>
+            <a:off x="1395892" y="691659"/>
+            <a:ext cx="1565938" cy="260841"/>
+          </a:xfrm>
+          <a:prstGeom prst="rect">
+            <a:avLst/>
+          </a:prstGeom>
+        </p:spPr>
+        <p:txBody>
+          <a:bodyPr lIns="0" tIns="0" rIns="0" bIns="0" rtlCol="0" anchor="t">
+            <a:spAutoFit/>
+          </a:bodyPr>
+          <a:lstStyle/>
+          <a:p>
+            <a:pPr>
+              <a:lnSpc>
+                <a:spcPts val="1652"/>
+              </a:lnSpc>
+            </a:pPr>
+            <a:r>
+              <a:rPr lang="en-US" sz="2800" b="1" dirty="0">
+                <a:solidFill>
+                  <a:srgbClr val="343434"/>
+                </a:solidFill>
+                <a:latin typeface="Coco Gothic"/>
+                <a:ea typeface="Coco Gothic"/>
+                <a:cs typeface="Coco Gothic"/>
+                <a:sym typeface="Coco Gothic"/>
+              </a:rPr>
+              <a:t>Yinni</a:t>
+            </a:r>
+          </a:p>
+        </p:txBody>
+      </p:sp>
+      <p:sp>
+        <p:nvSpPr>
+          <p:cNvPr id="19" name="TextBox 4">
+            <a:extLst>
+              <a:ext uri="{FF2B5EF4-FFF2-40B4-BE49-F238E27FC236}">
+                <a16:creationId xmlns:a16="http://schemas.microsoft.com/office/drawing/2014/main" id="{F3B30931-8D0A-BCFC-E7D3-40DA62D9F871}"/>
+              </a:ext>
+            </a:extLst>
+          </p:cNvPr>
+          <p:cNvSpPr txBox="1"/>
+          <p:nvPr/>
+        </p:nvSpPr>
+        <p:spPr>
+          <a:xfrm>
+            <a:off x="1394542" y="880543"/>
+            <a:ext cx="3329858" cy="224357"/>
+          </a:xfrm>
+          <a:prstGeom prst="rect">
+            <a:avLst/>
+          </a:prstGeom>
+        </p:spPr>
+        <p:txBody>
+          <a:bodyPr wrap="square" lIns="0" tIns="0" rIns="0" bIns="0" rtlCol="0" anchor="t">
+            <a:spAutoFit/>
+          </a:bodyPr>
+          <a:lstStyle/>
+          <a:p>
+            <a:pPr>
+              <a:lnSpc>
+                <a:spcPts val="1654"/>
+              </a:lnSpc>
+            </a:pPr>
+            <a:r>
+              <a:rPr lang="en-US" sz="1654" b="1" spc="198" dirty="0">
+                <a:solidFill>
+                  <a:srgbClr val="343434"/>
+                </a:solidFill>
+                <a:latin typeface="Coco Gothic Bold"/>
+                <a:ea typeface="Coco Gothic Bold"/>
+                <a:cs typeface="Coco Gothic Bold"/>
+                <a:sym typeface="Coco Gothic Bold"/>
+              </a:rPr>
+              <a:t>AI-Assisted Shopping</a:t>
+            </a:r>
+          </a:p>
+        </p:txBody>
+      </p:sp>
+      <p:pic>
+        <p:nvPicPr>
+          <p:cNvPr id="20" name="Picture 19">
+            <a:extLst>
+              <a:ext uri="{FF2B5EF4-FFF2-40B4-BE49-F238E27FC236}">
+                <a16:creationId xmlns:a16="http://schemas.microsoft.com/office/drawing/2014/main" id="{CA6A5C74-D7EE-009B-E7BC-7C7AE2339AC8}"/>
+              </a:ext>
+            </a:extLst>
+          </p:cNvPr>
+          <p:cNvPicPr>
+            <a:picLocks noChangeAspect="1"/>
+          </p:cNvPicPr>
+          <p:nvPr/>
+        </p:nvPicPr>
+        <p:blipFill>
+          <a:blip r:embed="rId6" cstate="print">
+            <a:extLst>
+              <a:ext uri="{28A0092B-C50C-407E-A947-70E740481C1C}">
+                <a14:useLocalDpi xmlns:a14="http://schemas.microsoft.com/office/drawing/2010/main" val="0"/>
+              </a:ext>
+            </a:extLst>
+          </a:blip>
+          <a:stretch>
+            <a:fillRect/>
+          </a:stretch>
+        </p:blipFill>
+        <p:spPr>
+          <a:xfrm>
+            <a:off x="644350" y="397507"/>
+            <a:ext cx="859793" cy="859793"/>
+          </a:xfrm>
+          <a:prstGeom prst="rect">
+            <a:avLst/>
+          </a:prstGeom>
+        </p:spPr>
+      </p:pic>
+      <p:grpSp>
+        <p:nvGrpSpPr>
+          <p:cNvPr id="25" name="Group 17">
+            <a:extLst>
+              <a:ext uri="{FF2B5EF4-FFF2-40B4-BE49-F238E27FC236}">
+                <a16:creationId xmlns:a16="http://schemas.microsoft.com/office/drawing/2014/main" id="{0AE9E9F3-060E-C665-D34F-20B0CD1E31D6}"/>
+              </a:ext>
+            </a:extLst>
+          </p:cNvPr>
+          <p:cNvGrpSpPr/>
+          <p:nvPr/>
+        </p:nvGrpSpPr>
+        <p:grpSpPr>
+          <a:xfrm>
+            <a:off x="13335000" y="9253126"/>
+            <a:ext cx="3918346" cy="670011"/>
+            <a:chOff x="0" y="-66675"/>
+            <a:chExt cx="4327267" cy="893347"/>
+          </a:xfrm>
+        </p:grpSpPr>
+        <p:sp>
+          <p:nvSpPr>
+            <p:cNvPr id="26" name="TextBox 18">
+              <a:extLst>
+                <a:ext uri="{FF2B5EF4-FFF2-40B4-BE49-F238E27FC236}">
+                  <a16:creationId xmlns:a16="http://schemas.microsoft.com/office/drawing/2014/main" id="{5080063C-1D14-298E-669B-618E2509075A}"/>
+                </a:ext>
+              </a:extLst>
+            </p:cNvPr>
+            <p:cNvSpPr txBox="1"/>
+            <p:nvPr/>
+          </p:nvSpPr>
+          <p:spPr>
+            <a:xfrm>
+              <a:off x="0" y="20383"/>
+              <a:ext cx="3493131" cy="806289"/>
+            </a:xfrm>
+            <a:prstGeom prst="rect">
+              <a:avLst/>
+            </a:prstGeom>
+          </p:spPr>
+          <p:txBody>
+            <a:bodyPr lIns="0" tIns="0" rIns="0" bIns="0" rtlCol="0" anchor="t">
+              <a:spAutoFit/>
+            </a:bodyPr>
+            <a:lstStyle/>
+            <a:p>
+              <a:pPr algn="l">
+                <a:lnSpc>
+                  <a:spcPts val="2416"/>
+                </a:lnSpc>
+              </a:pPr>
+              <a:r>
+                <a:rPr lang="en-US" sz="1726" b="1" dirty="0">
+                  <a:solidFill>
+                    <a:srgbClr val="343434"/>
+                  </a:solidFill>
+                  <a:latin typeface="Coco Gothic Heavy"/>
+                  <a:ea typeface="Coco Gothic Heavy"/>
+                  <a:cs typeface="Coco Gothic Heavy"/>
+                  <a:sym typeface="Coco Gothic Heavy"/>
+                </a:rPr>
+                <a:t>APPLICATION PROPOSAL</a:t>
+              </a:r>
+            </a:p>
+          </p:txBody>
+        </p:sp>
+        <p:sp>
+          <p:nvSpPr>
+            <p:cNvPr id="27" name="TextBox 19">
+              <a:extLst>
+                <a:ext uri="{FF2B5EF4-FFF2-40B4-BE49-F238E27FC236}">
+                  <a16:creationId xmlns:a16="http://schemas.microsoft.com/office/drawing/2014/main" id="{10223FE2-C455-D7E0-1169-9614548AE5D6}"/>
+                </a:ext>
+              </a:extLst>
+            </p:cNvPr>
+            <p:cNvSpPr txBox="1"/>
+            <p:nvPr/>
+          </p:nvSpPr>
+          <p:spPr>
+            <a:xfrm>
+              <a:off x="3530953" y="-66675"/>
+              <a:ext cx="796314" cy="571288"/>
+            </a:xfrm>
+            <a:prstGeom prst="rect">
+              <a:avLst/>
+            </a:prstGeom>
+          </p:spPr>
+          <p:txBody>
+            <a:bodyPr lIns="0" tIns="0" rIns="0" bIns="0" rtlCol="0" anchor="t">
+              <a:spAutoFit/>
+            </a:bodyPr>
+            <a:lstStyle/>
+            <a:p>
+              <a:pPr algn="ctr">
+                <a:lnSpc>
+                  <a:spcPts val="3499"/>
+                </a:lnSpc>
+              </a:pPr>
+              <a:r>
+                <a:rPr lang="en-US" sz="2499" b="1" dirty="0">
+                  <a:solidFill>
+                    <a:srgbClr val="343434"/>
+                  </a:solidFill>
+                  <a:latin typeface="Coco Gothic Heavy"/>
+                  <a:ea typeface="Coco Gothic Heavy"/>
+                  <a:cs typeface="Coco Gothic Heavy"/>
+                  <a:sym typeface="Coco Gothic Heavy"/>
+                </a:rPr>
+                <a:t>20</a:t>
+              </a:r>
+            </a:p>
+          </p:txBody>
+        </p:sp>
+        <p:sp>
+          <p:nvSpPr>
+            <p:cNvPr id="28" name="AutoShape 20">
+              <a:extLst>
+                <a:ext uri="{FF2B5EF4-FFF2-40B4-BE49-F238E27FC236}">
+                  <a16:creationId xmlns:a16="http://schemas.microsoft.com/office/drawing/2014/main" id="{74C86D43-316E-2920-6F79-0093FB373B11}"/>
+                </a:ext>
+              </a:extLst>
+            </p:cNvPr>
+            <p:cNvSpPr/>
+            <p:nvPr/>
+          </p:nvSpPr>
+          <p:spPr>
+            <a:xfrm>
+              <a:off x="3493131" y="20147"/>
+              <a:ext cx="0" cy="405967"/>
+            </a:xfrm>
+            <a:prstGeom prst="line">
+              <a:avLst/>
+            </a:prstGeom>
+            <a:ln w="50800" cap="flat">
+              <a:solidFill>
+                <a:schemeClr val="tx2">
+                  <a:lumMod val="40000"/>
+                  <a:lumOff val="60000"/>
+                </a:schemeClr>
+              </a:solidFill>
+              <a:prstDash val="solid"/>
+              <a:headEnd type="none" w="sm" len="sm"/>
+              <a:tailEnd type="none" w="sm" len="sm"/>
+            </a:ln>
+          </p:spPr>
+          <p:txBody>
+            <a:bodyPr/>
+            <a:lstStyle/>
+            <a:p>
+              <a:endParaRPr lang="en-ID"/>
+            </a:p>
+          </p:txBody>
+        </p:sp>
+      </p:grpSp>
+    </p:spTree>
+  </p:cSld>
+  <p:clrMapOvr>
+    <a:masterClrMapping/>
+  </p:clrMapOvr>
+</p:sld>
+</file>
+
+<file path=ppt/slides/slide21.xml><?xml version="1.0" encoding="utf-8"?>
+<p:sld xmlns:a="http://schemas.openxmlformats.org/drawingml/2006/main" xmlns:r="http://schemas.openxmlformats.org/officeDocument/2006/relationships" xmlns:p="http://schemas.openxmlformats.org/presentationml/2006/main">
+  <p:cSld>
+    <p:bg>
+      <p:bgPr>
+        <a:solidFill>
+          <a:schemeClr val="tx2">
+            <a:lumMod val="20000"/>
+            <a:lumOff val="80000"/>
+          </a:schemeClr>
+        </a:solidFill>
+        <a:effectLst/>
+      </p:bgPr>
+    </p:bg>
+    <p:spTree>
+      <p:nvGrpSpPr>
         <p:cNvPr id="1" name="">
           <a:extLst>
             <a:ext uri="{FF2B5EF4-FFF2-40B4-BE49-F238E27FC236}">
@@ -17736,7 +18731,7 @@
                 <a:cs typeface="Poppins"/>
                 <a:sym typeface="Poppins"/>
               </a:rPr>
-              <a:t>There are a lot of Fullstack engineers in Indonesia and maybe a lot of them are in a better skills, but I guarantee that I am the one with the fastest skill development among all of them. The reason is, beside of the fact that I am smart and so enthusiastic with Software Engineering, I also have a long history of preparing my self to be an IT Entrepreneur. That builds the now-me who are fast-learner and highly-dedicated. You can give me the opportunity to be Cofounding Fullstack Engineer Intern for your company, I will show how eligible I am for Cofounding Fullstack Engineer position.</a:t>
+              <a:t>There are a lot of Fullstack Engineers in Indonesia and maybe a lot of them are in a better skills, but I guarantee that I am the one with the fastest skill development progress among all of them. And also, as you know, most of Fullstack Engineers do not fluent in the AI implementation, they maybe barely know how to make machine learning service and incorporate it into Microservices App. You can give me the opportunity to be the Cofounding Fullstack Engineer Intern for your company, I will show you how eligible I am for Cofounding Fullstack Engineer position.</a:t>
             </a:r>
           </a:p>
         </p:txBody>
@@ -18052,7 +19047,7 @@
                   <a:cs typeface="Coco Gothic Heavy"/>
                   <a:sym typeface="Coco Gothic Heavy"/>
                 </a:rPr>
-                <a:t>20</a:t>
+                <a:t>21</a:t>
               </a:r>
             </a:p>
           </p:txBody>
@@ -18111,7 +19106,7 @@
 </p:sld>
 </file>
 
-<file path=ppt/slides/slide21.xml><?xml version="1.0" encoding="utf-8"?>
+<file path=ppt/slides/slide22.xml><?xml version="1.0" encoding="utf-8"?>
 <p:sld xmlns:a="http://schemas.openxmlformats.org/drawingml/2006/main" xmlns:r="http://schemas.openxmlformats.org/officeDocument/2006/relationships" xmlns:p="http://schemas.openxmlformats.org/presentationml/2006/main">
   <p:cSld>
     <p:spTree>
@@ -18325,7 +19320,7 @@
               </a:lnSpc>
             </a:pPr>
             <a:r>
-              <a:rPr lang="en-US" sz="2499" b="1">
+              <a:rPr lang="en-US" sz="2499" b="1" dirty="0">
                 <a:solidFill>
                   <a:srgbClr val="FFFFFF"/>
                 </a:solidFill>
@@ -18347,7 +19342,7 @@
         </p:nvGrpSpPr>
         <p:grpSpPr>
           <a:xfrm>
-            <a:off x="-772763" y="9925307"/>
+            <a:off x="-772763" y="9900504"/>
             <a:ext cx="19685815" cy="805596"/>
             <a:chOff x="0" y="0"/>
             <a:chExt cx="5184741" cy="212174"/>
@@ -18443,7 +19438,7 @@
         </p:nvSpPr>
         <p:spPr>
           <a:xfrm>
-            <a:off x="2531067" y="1724057"/>
+            <a:off x="2531067" y="1350645"/>
             <a:ext cx="13078155" cy="897255"/>
           </a:xfrm>
           <a:prstGeom prst="rect">
@@ -18585,7 +19580,7 @@
                   <a:cs typeface="Coco Gothic Heavy"/>
                   <a:sym typeface="Coco Gothic Heavy"/>
                 </a:rPr>
-                <a:t>21</a:t>
+                <a:t>22</a:t>
               </a:r>
             </a:p>
           </p:txBody>
@@ -18855,7 +19850,7 @@
         </p:nvSpPr>
         <p:spPr>
           <a:xfrm>
-            <a:off x="4343400" y="2838303"/>
+            <a:off x="4343400" y="2867218"/>
             <a:ext cx="10622280" cy="6086282"/>
           </a:xfrm>
           <a:prstGeom prst="rect">
@@ -19284,6 +20279,28 @@
               </a:rPr>
               <a:t> Live Testing: </a:t>
             </a:r>
+            <a:r>
+              <a:rPr lang="en-US" sz="2000" b="1" dirty="0">
+                <a:solidFill>
+                  <a:srgbClr val="343434"/>
+                </a:solidFill>
+                <a:latin typeface="Poppins"/>
+                <a:ea typeface="Poppins"/>
+                <a:cs typeface="Poppins"/>
+                <a:sym typeface="Poppins"/>
+                <a:hlinkClick r:id="rId11"/>
+              </a:rPr>
+              <a:t>http://76.13.17.200:8501</a:t>
+            </a:r>
+            <a:endParaRPr lang="en-US" sz="2000" b="1" dirty="0">
+              <a:solidFill>
+                <a:srgbClr val="343434"/>
+              </a:solidFill>
+              <a:latin typeface="Poppins"/>
+              <a:ea typeface="Poppins"/>
+              <a:cs typeface="Poppins"/>
+              <a:sym typeface="Poppins"/>
+            </a:endParaRPr>
           </a:p>
           <a:p>
             <a:pPr marL="342900" indent="-79375" algn="just">
@@ -19338,7 +20355,7 @@
                 <a:ea typeface="Poppins"/>
                 <a:cs typeface="Poppins"/>
                 <a:sym typeface="Poppins"/>
-                <a:hlinkClick r:id="rId11"/>
+                <a:hlinkClick r:id="rId12"/>
               </a:rPr>
               <a:t>https://github.com/azzamt11/yinni_ai</a:t>
             </a:r>
@@ -19420,7 +20437,7 @@
                 <a:ea typeface="Poppins"/>
                 <a:cs typeface="Poppins"/>
                 <a:sym typeface="Poppins"/>
-                <a:hlinkClick r:id="rId12"/>
+                <a:hlinkClick r:id="rId13"/>
               </a:rPr>
               <a:t>https://github.com/azzamt11/yinni_backend/blob/main/yinni_api_collection.json</a:t>
             </a:r>
@@ -19444,7 +20461,7 @@
 </p:sld>
 </file>
 
-<file path=ppt/slides/slide22.xml><?xml version="1.0" encoding="utf-8"?>
+<file path=ppt/slides/slide23.xml><?xml version="1.0" encoding="utf-8"?>
 <p:sld xmlns:a="http://schemas.openxmlformats.org/drawingml/2006/main" xmlns:r="http://schemas.openxmlformats.org/officeDocument/2006/relationships" xmlns:p="http://schemas.openxmlformats.org/presentationml/2006/main">
   <p:cSld>
     <p:bg>
@@ -19688,65 +20705,6 @@
       </p:sp>
       <p:sp>
         <p:nvSpPr>
-          <p:cNvPr id="8" name="Freeform 8"/>
-          <p:cNvSpPr/>
-          <p:nvPr/>
-        </p:nvSpPr>
-        <p:spPr>
-          <a:xfrm>
-            <a:off x="693714" y="512636"/>
-            <a:ext cx="700828" cy="516064"/>
-          </a:xfrm>
-          <a:custGeom>
-            <a:avLst/>
-            <a:gdLst/>
-            <a:ahLst/>
-            <a:cxnLst/>
-            <a:rect l="l" t="t" r="r" b="b"/>
-            <a:pathLst>
-              <a:path w="700828" h="516064">
-                <a:moveTo>
-                  <a:pt x="0" y="0"/>
-                </a:moveTo>
-                <a:lnTo>
-                  <a:pt x="700828" y="0"/>
-                </a:lnTo>
-                <a:lnTo>
-                  <a:pt x="700828" y="516064"/>
-                </a:lnTo>
-                <a:lnTo>
-                  <a:pt x="0" y="516064"/>
-                </a:lnTo>
-                <a:lnTo>
-                  <a:pt x="0" y="0"/>
-                </a:lnTo>
-                <a:close/>
-              </a:path>
-            </a:pathLst>
-          </a:custGeom>
-          <a:blipFill>
-            <a:blip r:embed="rId6">
-              <a:extLst>
-                <a:ext uri="{96DAC541-7B7A-43D3-8B79-37D633B846F1}">
-                  <asvg:svgBlip xmlns:asvg="http://schemas.microsoft.com/office/drawing/2016/SVG/main" r:embed="rId7"/>
-                </a:ext>
-              </a:extLst>
-            </a:blip>
-            <a:stretch>
-              <a:fillRect/>
-            </a:stretch>
-          </a:blipFill>
-        </p:spPr>
-        <p:txBody>
-          <a:bodyPr/>
-          <a:lstStyle/>
-          <a:p>
-            <a:endParaRPr lang="en-ID"/>
-          </a:p>
-        </p:txBody>
-      </p:sp>
-      <p:sp>
-        <p:nvSpPr>
           <p:cNvPr id="9" name="Freeform 9"/>
           <p:cNvSpPr/>
           <p:nvPr/>
@@ -19784,10 +20742,10 @@
             </a:pathLst>
           </a:custGeom>
           <a:blipFill>
-            <a:blip r:embed="rId8">
+            <a:blip r:embed="rId6">
               <a:extLst>
                 <a:ext uri="{96DAC541-7B7A-43D3-8B79-37D633B846F1}">
-                  <asvg:svgBlip xmlns:asvg="http://schemas.microsoft.com/office/drawing/2016/SVG/main" r:embed="rId9"/>
+                  <asvg:svgBlip xmlns:asvg="http://schemas.microsoft.com/office/drawing/2016/SVG/main" r:embed="rId7"/>
                 </a:ext>
               </a:extLst>
             </a:blip>
@@ -19806,14 +20764,14 @@
       </p:sp>
       <p:sp>
         <p:nvSpPr>
-          <p:cNvPr id="10" name="TextBox 10"/>
+          <p:cNvPr id="12" name="TextBox 12"/>
           <p:cNvSpPr txBox="1"/>
           <p:nvPr/>
         </p:nvSpPr>
         <p:spPr>
           <a:xfrm>
-            <a:off x="1395892" y="573718"/>
-            <a:ext cx="1565938" cy="229673"/>
+            <a:off x="4591809" y="4410049"/>
+            <a:ext cx="9104383" cy="1485951"/>
           </a:xfrm>
           <a:prstGeom prst="rect">
             <a:avLst/>
@@ -19827,34 +20785,37 @@
           <a:p>
             <a:pPr algn="ctr">
               <a:lnSpc>
-                <a:spcPts val="1652"/>
+                <a:spcPts val="11053"/>
               </a:lnSpc>
             </a:pPr>
             <a:r>
-              <a:rPr lang="en-US" sz="1652">
-                <a:solidFill>
-                  <a:srgbClr val="FFFFFF"/>
-                </a:solidFill>
-                <a:latin typeface="Coco Gothic"/>
-                <a:ea typeface="Coco Gothic"/>
-                <a:cs typeface="Coco Gothic"/>
-                <a:sym typeface="Coco Gothic"/>
+              <a:rPr lang="en-US" sz="9958" b="1" dirty="0">
+                <a:latin typeface="Coco Gothic Heavy"/>
+                <a:ea typeface="Coco Gothic Heavy"/>
+                <a:cs typeface="Coco Gothic Heavy"/>
+                <a:sym typeface="Coco Gothic Heavy"/>
               </a:rPr>
-              <a:t>UNIVERSITAS </a:t>
+              <a:t>Thank You</a:t>
             </a:r>
           </a:p>
         </p:txBody>
       </p:sp>
       <p:sp>
         <p:nvSpPr>
-          <p:cNvPr id="11" name="TextBox 11"/>
+          <p:cNvPr id="13" name="TextBox 3">
+            <a:extLst>
+              <a:ext uri="{FF2B5EF4-FFF2-40B4-BE49-F238E27FC236}">
+                <a16:creationId xmlns:a16="http://schemas.microsoft.com/office/drawing/2014/main" id="{1E0E3C91-FCC6-379E-C6ED-4890E01F22A6}"/>
+              </a:ext>
+            </a:extLst>
+          </p:cNvPr>
           <p:cNvSpPr txBox="1"/>
           <p:nvPr/>
         </p:nvSpPr>
         <p:spPr>
           <a:xfrm>
-            <a:off x="1394542" y="754594"/>
-            <a:ext cx="1568637" cy="232074"/>
+            <a:off x="1395892" y="691659"/>
+            <a:ext cx="1565938" cy="260841"/>
           </a:xfrm>
           <a:prstGeom prst="rect">
             <a:avLst/>
@@ -19866,64 +20827,109 @@
           </a:bodyPr>
           <a:lstStyle/>
           <a:p>
-            <a:pPr algn="ctr">
+            <a:pPr>
+              <a:lnSpc>
+                <a:spcPts val="1652"/>
+              </a:lnSpc>
+            </a:pPr>
+            <a:r>
+              <a:rPr lang="en-US" sz="2800" b="1" dirty="0">
+                <a:solidFill>
+                  <a:srgbClr val="343434"/>
+                </a:solidFill>
+                <a:latin typeface="Coco Gothic"/>
+                <a:ea typeface="Coco Gothic"/>
+                <a:cs typeface="Coco Gothic"/>
+                <a:sym typeface="Coco Gothic"/>
+              </a:rPr>
+              <a:t>Yinni</a:t>
+            </a:r>
+          </a:p>
+        </p:txBody>
+      </p:sp>
+      <p:sp>
+        <p:nvSpPr>
+          <p:cNvPr id="14" name="TextBox 4">
+            <a:extLst>
+              <a:ext uri="{FF2B5EF4-FFF2-40B4-BE49-F238E27FC236}">
+                <a16:creationId xmlns:a16="http://schemas.microsoft.com/office/drawing/2014/main" id="{C73CAD0A-B6B9-2FBE-12F5-47D7E0E9EB2C}"/>
+              </a:ext>
+            </a:extLst>
+          </p:cNvPr>
+          <p:cNvSpPr txBox="1"/>
+          <p:nvPr/>
+        </p:nvSpPr>
+        <p:spPr>
+          <a:xfrm>
+            <a:off x="1394542" y="880543"/>
+            <a:ext cx="3329858" cy="224357"/>
+          </a:xfrm>
+          <a:prstGeom prst="rect">
+            <a:avLst/>
+          </a:prstGeom>
+        </p:spPr>
+        <p:txBody>
+          <a:bodyPr wrap="square" lIns="0" tIns="0" rIns="0" bIns="0" rtlCol="0" anchor="t">
+            <a:spAutoFit/>
+          </a:bodyPr>
+          <a:lstStyle/>
+          <a:p>
+            <a:pPr>
               <a:lnSpc>
                 <a:spcPts val="1654"/>
               </a:lnSpc>
             </a:pPr>
             <a:r>
-              <a:rPr lang="en-US" sz="1654" b="1" spc="198">
+              <a:rPr lang="en-US" sz="1654" b="1" spc="198" dirty="0">
                 <a:solidFill>
-                  <a:srgbClr val="FFFFFF"/>
+                  <a:srgbClr val="343434"/>
                 </a:solidFill>
                 <a:latin typeface="Coco Gothic Bold"/>
                 <a:ea typeface="Coco Gothic Bold"/>
                 <a:cs typeface="Coco Gothic Bold"/>
                 <a:sym typeface="Coco Gothic Bold"/>
               </a:rPr>
-              <a:t>KEITHSTON</a:t>
+              <a:t>AI-Assisted Shopping</a:t>
             </a:r>
           </a:p>
         </p:txBody>
       </p:sp>
-      <p:sp>
-        <p:nvSpPr>
-          <p:cNvPr id="12" name="TextBox 12"/>
-          <p:cNvSpPr txBox="1"/>
-          <p:nvPr/>
-        </p:nvSpPr>
+      <p:pic>
+        <p:nvPicPr>
+          <p:cNvPr id="15" name="Picture 14">
+            <a:extLst>
+              <a:ext uri="{FF2B5EF4-FFF2-40B4-BE49-F238E27FC236}">
+                <a16:creationId xmlns:a16="http://schemas.microsoft.com/office/drawing/2014/main" id="{C4C4AD73-78A6-F11D-997E-56DF7CDFCBB4}"/>
+              </a:ext>
+            </a:extLst>
+          </p:cNvPr>
+          <p:cNvPicPr>
+            <a:picLocks noChangeAspect="1"/>
+          </p:cNvPicPr>
+          <p:nvPr/>
+        </p:nvPicPr>
+        <p:blipFill>
+          <a:blip r:embed="rId8" cstate="print">
+            <a:extLst>
+              <a:ext uri="{28A0092B-C50C-407E-A947-70E740481C1C}">
+                <a14:useLocalDpi xmlns:a14="http://schemas.microsoft.com/office/drawing/2010/main" val="0"/>
+              </a:ext>
+            </a:extLst>
+          </a:blip>
+          <a:stretch>
+            <a:fillRect/>
+          </a:stretch>
+        </p:blipFill>
         <p:spPr>
           <a:xfrm>
-            <a:off x="4591809" y="4410049"/>
-            <a:ext cx="9104383" cy="1485951"/>
+            <a:off x="644350" y="397507"/>
+            <a:ext cx="859793" cy="859793"/>
           </a:xfrm>
           <a:prstGeom prst="rect">
             <a:avLst/>
           </a:prstGeom>
         </p:spPr>
-        <p:txBody>
-          <a:bodyPr lIns="0" tIns="0" rIns="0" bIns="0" rtlCol="0" anchor="t">
-            <a:spAutoFit/>
-          </a:bodyPr>
-          <a:lstStyle/>
-          <a:p>
-            <a:pPr algn="ctr">
-              <a:lnSpc>
-                <a:spcPts val="11053"/>
-              </a:lnSpc>
-            </a:pPr>
-            <a:r>
-              <a:rPr lang="en-US" sz="9958" b="1" dirty="0">
-                <a:latin typeface="Coco Gothic Heavy"/>
-                <a:ea typeface="Coco Gothic Heavy"/>
-                <a:cs typeface="Coco Gothic Heavy"/>
-                <a:sym typeface="Coco Gothic Heavy"/>
-              </a:rPr>
-              <a:t>Thank You</a:t>
-            </a:r>
-          </a:p>
-        </p:txBody>
-      </p:sp>
+      </p:pic>
     </p:spTree>
   </p:cSld>
   <p:clrMapOvr>
@@ -25264,15 +26270,15 @@
         </p:nvSpPr>
         <p:spPr>
           <a:xfrm>
-            <a:off x="2254964" y="4914900"/>
-            <a:ext cx="3813483" cy="3213700"/>
+            <a:off x="2057400" y="4914900"/>
+            <a:ext cx="4011047" cy="2854628"/>
           </a:xfrm>
           <a:prstGeom prst="rect">
             <a:avLst/>
           </a:prstGeom>
         </p:spPr>
         <p:txBody>
-          <a:bodyPr lIns="0" tIns="0" rIns="0" bIns="0" rtlCol="0" anchor="t">
+          <a:bodyPr wrap="square" lIns="0" tIns="0" rIns="0" bIns="0" rtlCol="0" anchor="t">
             <a:spAutoFit/>
           </a:bodyPr>
           <a:lstStyle/>
@@ -25292,7 +26298,55 @@
                 <a:cs typeface="Poppins"/>
                 <a:sym typeface="Poppins"/>
               </a:rPr>
-              <a:t>For Backend stack, Yinni App uses Kratos-Go Microservices framework which is a brand-new microservices framework developed by Alibaba group designed for Enterprise use with modern, scalable, clean, and neat structure. </a:t>
+              <a:t>For Backend stack, Yinni App uses </a:t>
+            </a:r>
+            <a:r>
+              <a:rPr lang="en-US" sz="2000" b="1" dirty="0">
+                <a:solidFill>
+                  <a:srgbClr val="343434"/>
+                </a:solidFill>
+                <a:latin typeface="Poppins"/>
+                <a:ea typeface="Poppins"/>
+                <a:cs typeface="Poppins"/>
+                <a:sym typeface="Poppins"/>
+              </a:rPr>
+              <a:t>Kratos-Go Microservices</a:t>
+            </a:r>
+            <a:r>
+              <a:rPr lang="en-US" sz="2000" dirty="0">
+                <a:solidFill>
+                  <a:srgbClr val="343434"/>
+                </a:solidFill>
+                <a:latin typeface="Poppins"/>
+                <a:ea typeface="Poppins"/>
+                <a:cs typeface="Poppins"/>
+                <a:sym typeface="Poppins"/>
+              </a:rPr>
+              <a:t> framework which is a brand-new microservices framework developed by </a:t>
+            </a:r>
+            <a:r>
+              <a:rPr lang="en-US" sz="2000" b="1" dirty="0">
+                <a:solidFill>
+                  <a:srgbClr val="343434"/>
+                </a:solidFill>
+                <a:latin typeface="Poppins"/>
+                <a:ea typeface="Poppins"/>
+                <a:cs typeface="Poppins"/>
+                <a:sym typeface="Poppins"/>
+              </a:rPr>
+              <a:t>Alibaba Group</a:t>
+            </a:r>
+            <a:r>
+              <a:rPr lang="en-US" sz="2000" dirty="0">
+                <a:solidFill>
+                  <a:srgbClr val="343434"/>
+                </a:solidFill>
+                <a:latin typeface="Poppins"/>
+                <a:ea typeface="Poppins"/>
+                <a:cs typeface="Poppins"/>
+                <a:sym typeface="Poppins"/>
+              </a:rPr>
+              <a:t>  designed for Enterprise use with modern, scalable, clean, and neat structure. </a:t>
             </a:r>
             <a:r>
               <a:rPr lang="en-US" sz="2000" dirty="0">
@@ -25355,7 +26409,31 @@
                 <a:cs typeface="Poppins"/>
                 <a:sym typeface="Poppins"/>
               </a:rPr>
-              <a:t>For AI and Machine Learning  stack, Yinni App uses OpenAI API, leveraging OpenAI Text Embedding 3 Small model for embedding layer and PyTorch Embedding Bag model for prompt classifier. </a:t>
+              <a:t>For AI and Machine Learning  stack, Yinni App uses OpenAI API, leveraging </a:t>
+            </a:r>
+            <a:r>
+              <a:rPr lang="en-US" sz="2000" b="1" dirty="0">
+                <a:solidFill>
+                  <a:srgbClr val="343434"/>
+                </a:solidFill>
+                <a:latin typeface="Poppins"/>
+                <a:ea typeface="Poppins"/>
+                <a:cs typeface="Poppins"/>
+                <a:sym typeface="Poppins"/>
+              </a:rPr>
+              <a:t>OpenAI Text Embedding 3 Small</a:t>
+            </a:r>
+            <a:r>
+              <a:rPr lang="en-US" sz="2000" dirty="0">
+                <a:solidFill>
+                  <a:srgbClr val="343434"/>
+                </a:solidFill>
+                <a:latin typeface="Poppins"/>
+                <a:ea typeface="Poppins"/>
+                <a:cs typeface="Poppins"/>
+                <a:sym typeface="Poppins"/>
+              </a:rPr>
+              <a:t> model for embedding layer and PyTorch Embedding Bag model for prompt classifier. </a:t>
             </a:r>
             <a:r>
               <a:rPr lang="en-US" sz="2000" dirty="0">
@@ -25443,7 +26521,79 @@
                 <a:cs typeface="Poppins"/>
                 <a:sym typeface="Poppins"/>
               </a:rPr>
-              <a:t>For Frontend stack, Yinni App uses React.js framework with Chakra-UI and the touch of Horizon-UI template which is a standard template for enterprise use. </a:t>
+              <a:t>For Frontend stack, Yinni App uses </a:t>
+            </a:r>
+            <a:r>
+              <a:rPr lang="en-US" sz="2000" b="1" dirty="0">
+                <a:solidFill>
+                  <a:srgbClr val="343434"/>
+                </a:solidFill>
+                <a:latin typeface="Poppins"/>
+                <a:ea typeface="Poppins"/>
+                <a:cs typeface="Poppins"/>
+                <a:sym typeface="Poppins"/>
+              </a:rPr>
+              <a:t>React.js</a:t>
+            </a:r>
+            <a:r>
+              <a:rPr lang="en-US" sz="2000" dirty="0">
+                <a:solidFill>
+                  <a:srgbClr val="343434"/>
+                </a:solidFill>
+                <a:latin typeface="Poppins"/>
+                <a:ea typeface="Poppins"/>
+                <a:cs typeface="Poppins"/>
+                <a:sym typeface="Poppins"/>
+              </a:rPr>
+              <a:t> framework with </a:t>
+            </a:r>
+            <a:r>
+              <a:rPr lang="en-US" sz="2000" b="1" dirty="0">
+                <a:solidFill>
+                  <a:srgbClr val="343434"/>
+                </a:solidFill>
+                <a:latin typeface="Poppins"/>
+                <a:ea typeface="Poppins"/>
+                <a:cs typeface="Poppins"/>
+                <a:sym typeface="Poppins"/>
+              </a:rPr>
+              <a:t>Chakra-UI</a:t>
+            </a:r>
+            <a:r>
+              <a:rPr lang="en-US" sz="2000" dirty="0">
+                <a:solidFill>
+                  <a:srgbClr val="343434"/>
+                </a:solidFill>
+                <a:latin typeface="Poppins"/>
+                <a:ea typeface="Poppins"/>
+                <a:cs typeface="Poppins"/>
+                <a:sym typeface="Poppins"/>
+              </a:rPr>
+              <a:t> and the touch of </a:t>
+            </a:r>
+            <a:r>
+              <a:rPr lang="en-US" sz="2000" b="1" dirty="0">
+                <a:solidFill>
+                  <a:srgbClr val="343434"/>
+                </a:solidFill>
+                <a:latin typeface="Poppins"/>
+                <a:ea typeface="Poppins"/>
+                <a:cs typeface="Poppins"/>
+                <a:sym typeface="Poppins"/>
+              </a:rPr>
+              <a:t>Horizon-UI</a:t>
+            </a:r>
+            <a:r>
+              <a:rPr lang="en-US" sz="2000" dirty="0">
+                <a:solidFill>
+                  <a:srgbClr val="343434"/>
+                </a:solidFill>
+                <a:latin typeface="Poppins"/>
+                <a:ea typeface="Poppins"/>
+                <a:cs typeface="Poppins"/>
+                <a:sym typeface="Poppins"/>
+              </a:rPr>
+              <a:t> template which is a standard template for enterprise use. </a:t>
             </a:r>
             <a:r>
               <a:rPr lang="en-US" sz="2000" dirty="0">
